--- a/prezentacie/p01w.pptx
+++ b/prezentacie/p01w.pptx
@@ -6,16 +6,15 @@
   </p:sldMasterIdLst>
   <p:sldIdLst>
     <p:sldId id="266" r:id="rId2"/>
-    <p:sldId id="257" r:id="rId3"/>
-    <p:sldId id="258" r:id="rId4"/>
-    <p:sldId id="268" r:id="rId5"/>
-    <p:sldId id="269" r:id="rId6"/>
-    <p:sldId id="270" r:id="rId7"/>
-    <p:sldId id="271" r:id="rId8"/>
-    <p:sldId id="272" r:id="rId9"/>
-    <p:sldId id="273" r:id="rId10"/>
-    <p:sldId id="274" r:id="rId11"/>
-    <p:sldId id="275" r:id="rId12"/>
+    <p:sldId id="277" r:id="rId3"/>
+    <p:sldId id="257" r:id="rId4"/>
+    <p:sldId id="258" r:id="rId5"/>
+    <p:sldId id="268" r:id="rId6"/>
+    <p:sldId id="269" r:id="rId7"/>
+    <p:sldId id="270" r:id="rId8"/>
+    <p:sldId id="271" r:id="rId9"/>
+    <p:sldId id="272" r:id="rId10"/>
+    <p:sldId id="273" r:id="rId11"/>
   </p:sldIdLst>
   <p:sldSz cx="12192000" cy="6858000"/>
   <p:notesSz cx="6858000" cy="9144000"/>
@@ -253,7 +252,7 @@
           <a:p>
             <a:fld id="{10052495-8BC8-4CFB-94B1-B0429F101A0D}" type="datetimeFigureOut">
               <a:rPr lang="sk-SK" smtClean="0"/>
-              <a:t>9. 9. 2025</a:t>
+              <a:t>3. 9. 2026</a:t>
             </a:fld>
             <a:endParaRPr lang="sk-SK"/>
           </a:p>
@@ -423,7 +422,7 @@
           <a:p>
             <a:fld id="{10052495-8BC8-4CFB-94B1-B0429F101A0D}" type="datetimeFigureOut">
               <a:rPr lang="sk-SK" smtClean="0"/>
-              <a:t>9. 9. 2025</a:t>
+              <a:t>3. 9. 2026</a:t>
             </a:fld>
             <a:endParaRPr lang="sk-SK"/>
           </a:p>
@@ -603,7 +602,7 @@
           <a:p>
             <a:fld id="{10052495-8BC8-4CFB-94B1-B0429F101A0D}" type="datetimeFigureOut">
               <a:rPr lang="sk-SK" smtClean="0"/>
-              <a:t>9. 9. 2025</a:t>
+              <a:t>3. 9. 2026</a:t>
             </a:fld>
             <a:endParaRPr lang="sk-SK"/>
           </a:p>
@@ -773,7 +772,7 @@
           <a:p>
             <a:fld id="{10052495-8BC8-4CFB-94B1-B0429F101A0D}" type="datetimeFigureOut">
               <a:rPr lang="sk-SK" smtClean="0"/>
-              <a:t>9. 9. 2025</a:t>
+              <a:t>3. 9. 2026</a:t>
             </a:fld>
             <a:endParaRPr lang="sk-SK"/>
           </a:p>
@@ -1019,7 +1018,7 @@
           <a:p>
             <a:fld id="{10052495-8BC8-4CFB-94B1-B0429F101A0D}" type="datetimeFigureOut">
               <a:rPr lang="sk-SK" smtClean="0"/>
-              <a:t>9. 9. 2025</a:t>
+              <a:t>3. 9. 2026</a:t>
             </a:fld>
             <a:endParaRPr lang="sk-SK"/>
           </a:p>
@@ -1251,7 +1250,7 @@
           <a:p>
             <a:fld id="{10052495-8BC8-4CFB-94B1-B0429F101A0D}" type="datetimeFigureOut">
               <a:rPr lang="sk-SK" smtClean="0"/>
-              <a:t>9. 9. 2025</a:t>
+              <a:t>3. 9. 2026</a:t>
             </a:fld>
             <a:endParaRPr lang="sk-SK"/>
           </a:p>
@@ -1618,7 +1617,7 @@
           <a:p>
             <a:fld id="{10052495-8BC8-4CFB-94B1-B0429F101A0D}" type="datetimeFigureOut">
               <a:rPr lang="sk-SK" smtClean="0"/>
-              <a:t>9. 9. 2025</a:t>
+              <a:t>3. 9. 2026</a:t>
             </a:fld>
             <a:endParaRPr lang="sk-SK"/>
           </a:p>
@@ -1736,7 +1735,7 @@
           <a:p>
             <a:fld id="{10052495-8BC8-4CFB-94B1-B0429F101A0D}" type="datetimeFigureOut">
               <a:rPr lang="sk-SK" smtClean="0"/>
-              <a:t>9. 9. 2025</a:t>
+              <a:t>3. 9. 2026</a:t>
             </a:fld>
             <a:endParaRPr lang="sk-SK"/>
           </a:p>
@@ -1831,7 +1830,7 @@
           <a:p>
             <a:fld id="{10052495-8BC8-4CFB-94B1-B0429F101A0D}" type="datetimeFigureOut">
               <a:rPr lang="sk-SK" smtClean="0"/>
-              <a:t>9. 9. 2025</a:t>
+              <a:t>3. 9. 2026</a:t>
             </a:fld>
             <a:endParaRPr lang="sk-SK"/>
           </a:p>
@@ -2108,7 +2107,7 @@
           <a:p>
             <a:fld id="{10052495-8BC8-4CFB-94B1-B0429F101A0D}" type="datetimeFigureOut">
               <a:rPr lang="sk-SK" smtClean="0"/>
-              <a:t>9. 9. 2025</a:t>
+              <a:t>3. 9. 2026</a:t>
             </a:fld>
             <a:endParaRPr lang="sk-SK"/>
           </a:p>
@@ -2365,7 +2364,7 @@
           <a:p>
             <a:fld id="{10052495-8BC8-4CFB-94B1-B0429F101A0D}" type="datetimeFigureOut">
               <a:rPr lang="sk-SK" smtClean="0"/>
-              <a:t>9. 9. 2025</a:t>
+              <a:t>3. 9. 2026</a:t>
             </a:fld>
             <a:endParaRPr lang="sk-SK"/>
           </a:p>
@@ -2578,7 +2577,7 @@
           <a:p>
             <a:fld id="{10052495-8BC8-4CFB-94B1-B0429F101A0D}" type="datetimeFigureOut">
               <a:rPr lang="sk-SK" smtClean="0"/>
-              <a:t>9. 9. 2025</a:t>
+              <a:t>3. 9. 2026</a:t>
             </a:fld>
             <a:endParaRPr lang="sk-SK"/>
           </a:p>
@@ -3492,8 +3491,8 @@
         </p:nvSpPr>
         <p:spPr>
           <a:xfrm>
-            <a:off x="5138928" y="1338729"/>
-            <a:ext cx="4795584" cy="4180542"/>
+            <a:off x="5138927" y="1338729"/>
+            <a:ext cx="6727942" cy="4180542"/>
           </a:xfrm>
         </p:spPr>
         <p:txBody>
@@ -3515,12 +3514,17 @@
               <a:rPr lang="sk-SK" dirty="0"/>
               <a:t>Učiteľ: </a:t>
             </a:r>
-            <a:br>
-              <a:rPr lang="sk-SK" dirty="0"/>
-            </a:br>
             <a:r>
               <a:rPr lang="sk-SK" b="1" dirty="0"/>
-              <a:t>Ing. Jozef Wagner PhD.</a:t>
+              <a:t>Ing. Jozef Wagner</a:t>
+            </a:r>
+            <a:r>
+              <a:rPr lang="en-US" b="1" dirty="0"/>
+              <a:t>,</a:t>
+            </a:r>
+            <a:r>
+              <a:rPr lang="sk-SK" b="1" dirty="0"/>
+              <a:t> PhD.</a:t>
             </a:r>
           </a:p>
           <a:p>
@@ -3537,9 +3541,6 @@
               <a:rPr lang="sk-SK" dirty="0"/>
               <a:t>Učebnica: </a:t>
             </a:r>
-            <a:br>
-              <a:rPr lang="sk-SK" dirty="0"/>
-            </a:br>
             <a:r>
               <a:rPr lang="sk-SK" dirty="0">
                 <a:hlinkClick r:id="rId2"/>
@@ -3588,7 +3589,7 @@
         <p:cNvPr id="1" name="">
           <a:extLst>
             <a:ext uri="{FF2B5EF4-FFF2-40B4-BE49-F238E27FC236}">
-              <a16:creationId xmlns:a16="http://schemas.microsoft.com/office/drawing/2014/main" id="{29B9C711-5315-3A0D-46E8-D49A9D8A45BB}"/>
+              <a16:creationId xmlns:a16="http://schemas.microsoft.com/office/drawing/2014/main" id="{2B19645D-3DE6-31A1-2E12-2EEEF039412D}"/>
             </a:ext>
           </a:extLst>
         </p:cNvPr>
@@ -3608,7 +3609,7 @@
           <p:cNvPr id="2" name="Nadpis 1">
             <a:extLst>
               <a:ext uri="{FF2B5EF4-FFF2-40B4-BE49-F238E27FC236}">
-                <a16:creationId xmlns:a16="http://schemas.microsoft.com/office/drawing/2014/main" id="{43E10DE6-F4CD-EBB9-1EFA-BE7A9F2EB884}"/>
+                <a16:creationId xmlns:a16="http://schemas.microsoft.com/office/drawing/2014/main" id="{9C3F4367-6FA3-4AEE-1997-FDF75A9C7E84}"/>
               </a:ext>
             </a:extLst>
           </p:cNvPr>
@@ -3627,8 +3628,15 @@
           <a:lstStyle/>
           <a:p>
             <a:r>
-              <a:rPr lang="sk-SK" sz="4000" dirty="0"/>
-              <a:t>Konštanta</a:t>
+              <a:rPr lang="sk-SK" sz="4000" dirty="0">
+                <a:solidFill>
+                  <a:srgbClr val="FF0000"/>
+                </a:solidFill>
+                <a:highlight>
+                  <a:srgbClr val="00FFFF"/>
+                </a:highlight>
+              </a:rPr>
+              <a:t>Opakovanie</a:t>
             </a:r>
           </a:p>
         </p:txBody>
@@ -3638,7 +3646,7 @@
           <p:cNvPr id="3" name="Zástupný objekt pre obsah 2">
             <a:extLst>
               <a:ext uri="{FF2B5EF4-FFF2-40B4-BE49-F238E27FC236}">
-                <a16:creationId xmlns:a16="http://schemas.microsoft.com/office/drawing/2014/main" id="{7C552BCA-6F41-7030-A48B-D9C2BFDDD795}"/>
+                <a16:creationId xmlns:a16="http://schemas.microsoft.com/office/drawing/2014/main" id="{C64145DB-D746-7FAF-ADA1-8514DD2B339E}"/>
               </a:ext>
             </a:extLst>
           </p:cNvPr>
@@ -3651,8 +3659,8 @@
         </p:nvSpPr>
         <p:spPr>
           <a:xfrm>
-            <a:off x="2062843" y="1575367"/>
-            <a:ext cx="8066314" cy="1583267"/>
+            <a:off x="1042218" y="1575367"/>
+            <a:ext cx="10311581" cy="4805768"/>
           </a:xfrm>
         </p:spPr>
         <p:txBody>
@@ -3668,8 +3676,38 @@
               <a:buNone/>
             </a:pPr>
             <a:r>
-              <a:rPr lang="sk-SK" sz="2800" dirty="0"/>
-              <a:t>Konštanta je ako premenná, ale jej hodnota sa nemá meniť.</a:t>
+              <a:rPr lang="sk-SK" sz="2800" b="1" dirty="0">
+                <a:solidFill>
+                  <a:srgbClr val="FF0000"/>
+                </a:solidFill>
+                <a:highlight>
+                  <a:srgbClr val="00FFFF"/>
+                </a:highlight>
+              </a:rPr>
+              <a:t>Premenná</a:t>
+            </a:r>
+            <a:r>
+              <a:rPr lang="sk-SK" sz="2800" dirty="0">
+                <a:solidFill>
+                  <a:srgbClr val="FF0000"/>
+                </a:solidFill>
+                <a:highlight>
+                  <a:srgbClr val="00FFFF"/>
+                </a:highlight>
+              </a:rPr>
+              <a:t> - pomenovaná referencia na objekt v pamäti počítača, </a:t>
+            </a:r>
+            <a:r>
+              <a:rPr lang="sk-SK" sz="2800" dirty="0">
+                <a:solidFill>
+                  <a:srgbClr val="FF0000"/>
+                </a:solidFill>
+                <a:highlight>
+                  <a:srgbClr val="FFFF00"/>
+                </a:highlight>
+                <a:latin typeface="Consolas" panose="020B0609020204030204" pitchFamily="49" charset="0"/>
+              </a:rPr>
+              <a:t>a = 10</a:t>
             </a:r>
           </a:p>
           <a:p>
@@ -3680,8 +3718,38 @@
               <a:buNone/>
             </a:pPr>
             <a:r>
-              <a:rPr lang="sk-SK" sz="2800" dirty="0"/>
-              <a:t>Pre názov konštanty sa používajú veľké písmená.</a:t>
+              <a:rPr lang="sk-SK" sz="2800" b="1" dirty="0">
+                <a:solidFill>
+                  <a:srgbClr val="FF0000"/>
+                </a:solidFill>
+                <a:highlight>
+                  <a:srgbClr val="00FFFF"/>
+                </a:highlight>
+              </a:rPr>
+              <a:t>Konštanta</a:t>
+            </a:r>
+            <a:r>
+              <a:rPr lang="sk-SK" sz="2800" dirty="0">
+                <a:solidFill>
+                  <a:srgbClr val="FF0000"/>
+                </a:solidFill>
+                <a:highlight>
+                  <a:srgbClr val="00FFFF"/>
+                </a:highlight>
+              </a:rPr>
+              <a:t> - hodnota sa nemá meniť, názov veľkými písmenami, </a:t>
+            </a:r>
+            <a:r>
+              <a:rPr lang="sk-SK" dirty="0">
+                <a:solidFill>
+                  <a:srgbClr val="FF0000"/>
+                </a:solidFill>
+                <a:highlight>
+                  <a:srgbClr val="FFFF00"/>
+                </a:highlight>
+                <a:latin typeface="Consolas" panose="020B0609020204030204" pitchFamily="49" charset="0"/>
+              </a:rPr>
+              <a:t>MAX = 20</a:t>
             </a:r>
           </a:p>
           <a:p>
@@ -3692,25 +3760,187 @@
               <a:buNone/>
             </a:pPr>
             <a:r>
-              <a:rPr lang="sk-SK" sz="2800" dirty="0"/>
-              <a:t>Je to iba dohoda, </a:t>
-            </a:r>
-            <a:r>
-              <a:rPr lang="sk-SK" sz="2800" dirty="0" err="1"/>
-              <a:t>Python</a:t>
-            </a:r>
-            <a:r>
-              <a:rPr lang="sk-SK" sz="2800" dirty="0"/>
-              <a:t> nekontroluje, či konštantu meníme</a:t>
-            </a:r>
-            <a:endParaRPr lang="sk-SK" sz="2800" i="1" dirty="0"/>
+              <a:rPr lang="sk-SK" sz="2800" b="1" dirty="0">
+                <a:solidFill>
+                  <a:srgbClr val="FF0000"/>
+                </a:solidFill>
+                <a:highlight>
+                  <a:srgbClr val="00FFFF"/>
+                </a:highlight>
+              </a:rPr>
+              <a:t>Štandardný výstup </a:t>
+            </a:r>
+            <a:r>
+              <a:rPr lang="sk-SK" sz="2800" dirty="0">
+                <a:solidFill>
+                  <a:srgbClr val="FF0000"/>
+                </a:solidFill>
+                <a:highlight>
+                  <a:srgbClr val="00FFFF"/>
+                </a:highlight>
+              </a:rPr>
+              <a:t>- </a:t>
+            </a:r>
+            <a:r>
+              <a:rPr lang="sk-SK" dirty="0" err="1">
+                <a:solidFill>
+                  <a:srgbClr val="FF0000"/>
+                </a:solidFill>
+                <a:highlight>
+                  <a:srgbClr val="FFFF00"/>
+                </a:highlight>
+                <a:latin typeface="Consolas" panose="020B0609020204030204" pitchFamily="49" charset="0"/>
+              </a:rPr>
+              <a:t>print</a:t>
+            </a:r>
+            <a:r>
+              <a:rPr lang="sk-SK" dirty="0">
+                <a:solidFill>
+                  <a:srgbClr val="FF0000"/>
+                </a:solidFill>
+                <a:highlight>
+                  <a:srgbClr val="FFFF00"/>
+                </a:highlight>
+                <a:latin typeface="Consolas" panose="020B0609020204030204" pitchFamily="49" charset="0"/>
+              </a:rPr>
+              <a:t>()</a:t>
+            </a:r>
+          </a:p>
+          <a:p>
+            <a:pPr marL="0" indent="0">
+              <a:spcBef>
+                <a:spcPts val="1200"/>
+              </a:spcBef>
+              <a:buNone/>
+            </a:pPr>
+            <a:r>
+              <a:rPr lang="sk-SK" sz="2800" b="1" dirty="0">
+                <a:solidFill>
+                  <a:srgbClr val="FF0000"/>
+                </a:solidFill>
+                <a:highlight>
+                  <a:srgbClr val="00FFFF"/>
+                </a:highlight>
+              </a:rPr>
+              <a:t>Štandardný vstup </a:t>
+            </a:r>
+            <a:r>
+              <a:rPr lang="sk-SK" sz="2800" dirty="0">
+                <a:solidFill>
+                  <a:srgbClr val="FF0000"/>
+                </a:solidFill>
+                <a:highlight>
+                  <a:srgbClr val="00FFFF"/>
+                </a:highlight>
+              </a:rPr>
+              <a:t>- </a:t>
+            </a:r>
+            <a:r>
+              <a:rPr lang="sk-SK" dirty="0" err="1">
+                <a:solidFill>
+                  <a:srgbClr val="FF0000"/>
+                </a:solidFill>
+                <a:highlight>
+                  <a:srgbClr val="FFFF00"/>
+                </a:highlight>
+                <a:latin typeface="Consolas" panose="020B0609020204030204" pitchFamily="49" charset="0"/>
+              </a:rPr>
+              <a:t>input</a:t>
+            </a:r>
+            <a:r>
+              <a:rPr lang="sk-SK" dirty="0">
+                <a:solidFill>
+                  <a:srgbClr val="FF0000"/>
+                </a:solidFill>
+                <a:highlight>
+                  <a:srgbClr val="FFFF00"/>
+                </a:highlight>
+                <a:latin typeface="Consolas" panose="020B0609020204030204" pitchFamily="49" charset="0"/>
+              </a:rPr>
+              <a:t>()</a:t>
+            </a:r>
+          </a:p>
+          <a:p>
+            <a:pPr marL="0" indent="0">
+              <a:spcBef>
+                <a:spcPts val="1200"/>
+              </a:spcBef>
+              <a:buNone/>
+            </a:pPr>
+            <a:r>
+              <a:rPr lang="sk-SK" sz="2800" b="1" dirty="0">
+                <a:solidFill>
+                  <a:srgbClr val="FF0000"/>
+                </a:solidFill>
+                <a:highlight>
+                  <a:srgbClr val="00FFFF"/>
+                </a:highlight>
+              </a:rPr>
+              <a:t>F-</a:t>
+            </a:r>
+            <a:r>
+              <a:rPr lang="sk-SK" sz="2800" b="1" dirty="0" err="1">
+                <a:solidFill>
+                  <a:srgbClr val="FF0000"/>
+                </a:solidFill>
+                <a:highlight>
+                  <a:srgbClr val="00FFFF"/>
+                </a:highlight>
+              </a:rPr>
+              <a:t>String</a:t>
+            </a:r>
+            <a:r>
+              <a:rPr lang="sk-SK" sz="2800" dirty="0">
+                <a:solidFill>
+                  <a:srgbClr val="FF0000"/>
+                </a:solidFill>
+                <a:highlight>
+                  <a:srgbClr val="00FFFF"/>
+                </a:highlight>
+              </a:rPr>
+              <a:t> - Vkladanie premenných do reťazca,</a:t>
+            </a:r>
+            <a:br>
+              <a:rPr lang="sk-SK" sz="2800" dirty="0">
+                <a:solidFill>
+                  <a:srgbClr val="FF0000"/>
+                </a:solidFill>
+                <a:highlight>
+                  <a:srgbClr val="00FFFF"/>
+                </a:highlight>
+              </a:rPr>
+            </a:br>
+            <a:r>
+              <a:rPr lang="sk-SK" dirty="0" err="1">
+                <a:solidFill>
+                  <a:srgbClr val="FF0000"/>
+                </a:solidFill>
+                <a:highlight>
+                  <a:srgbClr val="FFFF00"/>
+                </a:highlight>
+                <a:latin typeface="Consolas" panose="020B0609020204030204" pitchFamily="49" charset="0"/>
+              </a:rPr>
+              <a:t>f"Ahoj</a:t>
+            </a:r>
+            <a:r>
+              <a:rPr lang="sk-SK" dirty="0">
+                <a:solidFill>
+                  <a:srgbClr val="FF0000"/>
+                </a:solidFill>
+                <a:highlight>
+                  <a:srgbClr val="FFFF00"/>
+                </a:highlight>
+                <a:latin typeface="Consolas" panose="020B0609020204030204" pitchFamily="49" charset="0"/>
+              </a:rPr>
+              <a:t> {meno} z obce {obec}!"</a:t>
+            </a:r>
           </a:p>
         </p:txBody>
       </p:sp>
     </p:spTree>
     <p:extLst>
       <p:ext uri="{BB962C8B-B14F-4D97-AF65-F5344CB8AC3E}">
-        <p14:creationId xmlns:p14="http://schemas.microsoft.com/office/powerpoint/2010/main" val="1822056184"/>
+        <p14:creationId xmlns:p14="http://schemas.microsoft.com/office/powerpoint/2010/main" val="1366001057"/>
       </p:ext>
     </p:extLst>
   </p:cSld>
@@ -3720,26 +3950,12 @@
 </p:sld>
 </file>
 
-<file path=ppt/slides/slide11.xml><?xml version="1.0" encoding="utf-8"?>
+<file path=ppt/slides/slide2.xml><?xml version="1.0" encoding="utf-8"?>
 <p:sld xmlns:a="http://schemas.openxmlformats.org/drawingml/2006/main" xmlns:r="http://schemas.openxmlformats.org/officeDocument/2006/relationships" xmlns:p="http://schemas.openxmlformats.org/presentationml/2006/main">
   <p:cSld>
-    <p:bg>
-      <p:bgPr>
-        <a:solidFill>
-          <a:schemeClr val="bg1"/>
-        </a:solidFill>
-        <a:effectLst/>
-      </p:bgPr>
-    </p:bg>
     <p:spTree>
       <p:nvGrpSpPr>
-        <p:cNvPr id="1" name="">
-          <a:extLst>
-            <a:ext uri="{FF2B5EF4-FFF2-40B4-BE49-F238E27FC236}">
-              <a16:creationId xmlns:a16="http://schemas.microsoft.com/office/drawing/2014/main" id="{051BCB1C-6EE4-34E5-09ED-685F4A5389AA}"/>
-            </a:ext>
-          </a:extLst>
-        </p:cNvPr>
+        <p:cNvPr id="1" name=""/>
         <p:cNvGrpSpPr/>
         <p:nvPr/>
       </p:nvGrpSpPr>
@@ -3753,10 +3969,10 @@
       </p:grpSpPr>
       <p:sp>
         <p:nvSpPr>
-          <p:cNvPr id="2" name="Nadpis 1">
+          <p:cNvPr id="3" name="Zástupný objekt pre obsah 2">
             <a:extLst>
               <a:ext uri="{FF2B5EF4-FFF2-40B4-BE49-F238E27FC236}">
-                <a16:creationId xmlns:a16="http://schemas.microsoft.com/office/drawing/2014/main" id="{A35CE6CE-A0DD-7232-45FD-6CFF2CD18E37}"/>
+                <a16:creationId xmlns:a16="http://schemas.microsoft.com/office/drawing/2014/main" id="{5588ED00-8EB1-B24E-FB3F-A5FB48C42353}"/>
               </a:ext>
             </a:extLst>
           </p:cNvPr>
@@ -3764,423 +3980,132 @@
             <a:spLocks noGrp="1"/>
           </p:cNvSpPr>
           <p:nvPr>
-            <p:ph type="title"/>
-          </p:nvPr>
-        </p:nvSpPr>
-        <p:spPr/>
+            <p:ph idx="1"/>
+          </p:nvPr>
+        </p:nvSpPr>
+        <p:spPr>
+          <a:xfrm>
+            <a:off x="838200" y="462116"/>
+            <a:ext cx="10515600" cy="5714847"/>
+          </a:xfrm>
+        </p:spPr>
         <p:txBody>
           <a:bodyPr>
             <a:normAutofit/>
           </a:bodyPr>
           <a:lstStyle/>
           <a:p>
-            <a:r>
-              <a:rPr lang="sk-SK" sz="4000" dirty="0"/>
-              <a:t>Vstup a výstup</a:t>
-            </a:r>
-          </a:p>
-        </p:txBody>
-      </p:sp>
-      <p:sp>
-        <p:nvSpPr>
-          <p:cNvPr id="3" name="Zástupný objekt pre obsah 2">
-            <a:extLst>
-              <a:ext uri="{FF2B5EF4-FFF2-40B4-BE49-F238E27FC236}">
-                <a16:creationId xmlns:a16="http://schemas.microsoft.com/office/drawing/2014/main" id="{FC2FE347-A3EB-6166-3866-BB2CC8A3AA7D}"/>
-              </a:ext>
-            </a:extLst>
-          </p:cNvPr>
-          <p:cNvSpPr>
-            <a:spLocks noGrp="1"/>
-          </p:cNvSpPr>
-          <p:nvPr>
-            <p:ph idx="1"/>
-          </p:nvPr>
-        </p:nvSpPr>
-        <p:spPr>
-          <a:xfrm>
-            <a:off x="2062843" y="1575367"/>
-            <a:ext cx="8066314" cy="1583267"/>
-          </a:xfrm>
-        </p:spPr>
-        <p:txBody>
-          <a:bodyPr>
-            <a:noAutofit/>
-          </a:bodyPr>
-          <a:lstStyle/>
-          <a:p>
-            <a:pPr>
-              <a:spcBef>
-                <a:spcPts val="1200"/>
-              </a:spcBef>
+            <a:pPr marL="0" indent="0">
+              <a:buNone/>
             </a:pPr>
             <a:r>
-              <a:rPr lang="sk-SK" sz="2800" dirty="0"/>
-              <a:t>do konzoly vypíšeme pomocou funkcie </a:t>
-            </a:r>
-            <a:r>
-              <a:rPr lang="sk-SK" sz="2800" dirty="0" err="1">
+              <a:rPr lang="sk-SK" sz="4000" dirty="0">
+                <a:latin typeface="+mj-lt"/>
+              </a:rPr>
+              <a:t>Základné pokyny:</a:t>
+            </a:r>
+          </a:p>
+          <a:p>
+            <a:pPr lvl="1"/>
+            <a:r>
+              <a:rPr lang="sk-SK" sz="2800">
+                <a:latin typeface="+mj-lt"/>
+              </a:rPr>
+              <a:t>Dodržiavať </a:t>
+            </a:r>
+            <a:r>
+              <a:rPr lang="sk-SK" sz="2800" dirty="0">
+                <a:latin typeface="+mj-lt"/>
+              </a:rPr>
+              <a:t>školský poriadok</a:t>
+            </a:r>
+          </a:p>
+          <a:p>
+            <a:pPr lvl="1"/>
+            <a:r>
+              <a:rPr lang="sk-SK" sz="2800" dirty="0">
+                <a:latin typeface="+mj-lt"/>
+              </a:rPr>
+              <a:t>Pripravený na hodinu, zošit a notebook</a:t>
+            </a:r>
+          </a:p>
+          <a:p>
+            <a:pPr lvl="1"/>
+            <a:r>
+              <a:rPr lang="sk-SK" sz="2800" dirty="0">
+                <a:latin typeface="+mj-lt"/>
+              </a:rPr>
+              <a:t>Ústne, praktické a písomné skúšania</a:t>
+            </a:r>
+          </a:p>
+          <a:p>
+            <a:pPr lvl="1"/>
+            <a:r>
+              <a:rPr lang="sk-SK" sz="2800" dirty="0">
+                <a:latin typeface="+mj-lt"/>
+              </a:rPr>
+              <a:t>Ospravedlnenia pred začiatkom hodiny</a:t>
+            </a:r>
+          </a:p>
+          <a:p>
+            <a:endParaRPr lang="sk-SK" dirty="0">
+              <a:latin typeface="+mj-lt"/>
+            </a:endParaRPr>
+          </a:p>
+          <a:p>
+            <a:pPr marL="0" indent="0">
+              <a:buNone/>
+            </a:pPr>
+            <a:r>
+              <a:rPr lang="sk-SK" sz="4000" dirty="0">
+                <a:latin typeface="+mj-lt"/>
+              </a:rPr>
+              <a:t>Legenda:</a:t>
+            </a:r>
+          </a:p>
+          <a:p>
+            <a:pPr lvl="1"/>
+            <a:r>
+              <a:rPr lang="sk-SK" sz="2800" dirty="0">
                 <a:highlight>
                   <a:srgbClr val="FFFF00"/>
                 </a:highlight>
                 <a:latin typeface="Consolas" panose="020B0609020204030204" pitchFamily="49" charset="0"/>
               </a:rPr>
-              <a:t>print</a:t>
-            </a:r>
+              <a:t>Žltý text – kód</a:t>
+            </a:r>
+          </a:p>
+          <a:p>
+            <a:pPr lvl="1"/>
             <a:r>
               <a:rPr lang="sk-SK" sz="2800" dirty="0">
-                <a:highlight>
-                  <a:srgbClr val="FFFF00"/>
-                </a:highlight>
-                <a:latin typeface="Consolas" panose="020B0609020204030204" pitchFamily="49" charset="0"/>
-              </a:rPr>
-              <a:t>()</a:t>
-            </a:r>
-          </a:p>
-          <a:p>
-            <a:pPr>
-              <a:spcBef>
-                <a:spcPts val="1200"/>
-              </a:spcBef>
-            </a:pPr>
-            <a:r>
-              <a:rPr lang="sk-SK" sz="2800" dirty="0"/>
-              <a:t>z klávesnice načítame pomocou funkcie </a:t>
-            </a:r>
-            <a:r>
-              <a:rPr lang="sk-SK" sz="2800" dirty="0" err="1">
-                <a:highlight>
-                  <a:srgbClr val="FFFF00"/>
-                </a:highlight>
-                <a:latin typeface="Consolas" panose="020B0609020204030204" pitchFamily="49" charset="0"/>
-              </a:rPr>
-              <a:t>input</a:t>
-            </a:r>
+                <a:solidFill>
+                  <a:srgbClr val="FF0000"/>
+                </a:solidFill>
+              </a:rPr>
+              <a:t>Červený text – poznámka do zošita</a:t>
+            </a:r>
+          </a:p>
+          <a:p>
+            <a:pPr lvl="1"/>
             <a:r>
               <a:rPr lang="sk-SK" sz="2800" dirty="0">
-                <a:highlight>
-                  <a:srgbClr val="FFFF00"/>
-                </a:highlight>
-                <a:latin typeface="Consolas" panose="020B0609020204030204" pitchFamily="49" charset="0"/>
-              </a:rPr>
-              <a:t>()</a:t>
-            </a:r>
-            <a:endParaRPr lang="sk-SK" sz="2800" i="1" dirty="0">
-              <a:highlight>
-                <a:srgbClr val="FFFF00"/>
-              </a:highlight>
-              <a:latin typeface="Consolas" panose="020B0609020204030204" pitchFamily="49" charset="0"/>
-            </a:endParaRPr>
-          </a:p>
-        </p:txBody>
-      </p:sp>
-      <p:sp>
-        <p:nvSpPr>
-          <p:cNvPr id="4" name="Nadpis 1">
-            <a:extLst>
-              <a:ext uri="{FF2B5EF4-FFF2-40B4-BE49-F238E27FC236}">
-                <a16:creationId xmlns:a16="http://schemas.microsoft.com/office/drawing/2014/main" id="{20E36EDC-73A8-40A3-30A8-DCA9EB692E3F}"/>
-              </a:ext>
-            </a:extLst>
-          </p:cNvPr>
-          <p:cNvSpPr txBox="1">
-            <a:spLocks/>
-          </p:cNvSpPr>
-          <p:nvPr/>
-        </p:nvSpPr>
-        <p:spPr>
-          <a:xfrm>
-            <a:off x="838200" y="3029782"/>
-            <a:ext cx="7886700" cy="1325563"/>
-          </a:xfrm>
-          <a:prstGeom prst="rect">
-            <a:avLst/>
-          </a:prstGeom>
-        </p:spPr>
-        <p:txBody>
-          <a:bodyPr vert="horz" lIns="91440" tIns="45720" rIns="91440" bIns="45720" rtlCol="0" anchor="ctr">
-            <a:normAutofit/>
-          </a:bodyPr>
-          <a:lstStyle>
-            <a:lvl1pPr algn="l" defTabSz="685800" rtl="0" eaLnBrk="1" latinLnBrk="0" hangingPunct="1">
-              <a:lnSpc>
-                <a:spcPct val="90000"/>
-              </a:lnSpc>
-              <a:spcBef>
-                <a:spcPct val="0"/>
-              </a:spcBef>
-              <a:buNone/>
-              <a:defRPr sz="3300" kern="1200">
-                <a:solidFill>
-                  <a:schemeClr val="tx1"/>
-                </a:solidFill>
-                <a:latin typeface="+mj-lt"/>
-                <a:ea typeface="+mj-ea"/>
-                <a:cs typeface="+mj-cs"/>
-              </a:defRPr>
-            </a:lvl1pPr>
-          </a:lstStyle>
-          <a:p>
-            <a:r>
-              <a:rPr lang="sk-SK" sz="4000" dirty="0"/>
-              <a:t>F-</a:t>
-            </a:r>
-            <a:r>
-              <a:rPr lang="sk-SK" sz="4000" dirty="0" err="1"/>
-              <a:t>String</a:t>
-            </a:r>
-            <a:endParaRPr lang="sk-SK" sz="4000" dirty="0"/>
-          </a:p>
-        </p:txBody>
-      </p:sp>
-      <p:sp>
-        <p:nvSpPr>
-          <p:cNvPr id="5" name="Zástupný objekt pre obsah 2">
-            <a:extLst>
-              <a:ext uri="{FF2B5EF4-FFF2-40B4-BE49-F238E27FC236}">
-                <a16:creationId xmlns:a16="http://schemas.microsoft.com/office/drawing/2014/main" id="{A999EE19-76A3-9606-48BB-2F5434FF4F7D}"/>
-              </a:ext>
-            </a:extLst>
-          </p:cNvPr>
-          <p:cNvSpPr txBox="1">
-            <a:spLocks/>
-          </p:cNvSpPr>
-          <p:nvPr/>
-        </p:nvSpPr>
-        <p:spPr>
-          <a:xfrm>
-            <a:off x="2062842" y="4226493"/>
-            <a:ext cx="8942615" cy="1809523"/>
-          </a:xfrm>
-          <a:prstGeom prst="rect">
-            <a:avLst/>
-          </a:prstGeom>
-        </p:spPr>
-        <p:txBody>
-          <a:bodyPr vert="horz" lIns="91440" tIns="45720" rIns="91440" bIns="45720" rtlCol="0">
-            <a:noAutofit/>
-          </a:bodyPr>
-          <a:lstStyle>
-            <a:lvl1pPr marL="171450" indent="-171450" algn="l" defTabSz="685800" rtl="0" eaLnBrk="1" latinLnBrk="0" hangingPunct="1">
-              <a:lnSpc>
-                <a:spcPct val="90000"/>
-              </a:lnSpc>
-              <a:spcBef>
-                <a:spcPts val="750"/>
-              </a:spcBef>
-              <a:buFont typeface="Arial" panose="020B0604020202020204" pitchFamily="34" charset="0"/>
-              <a:buChar char="•"/>
-              <a:defRPr sz="2100" kern="1200">
-                <a:solidFill>
-                  <a:schemeClr val="tx1"/>
-                </a:solidFill>
-                <a:latin typeface="+mn-lt"/>
-                <a:ea typeface="+mn-ea"/>
-                <a:cs typeface="+mn-cs"/>
-              </a:defRPr>
-            </a:lvl1pPr>
-            <a:lvl2pPr marL="514350" indent="-171450" algn="l" defTabSz="685800" rtl="0" eaLnBrk="1" latinLnBrk="0" hangingPunct="1">
-              <a:lnSpc>
-                <a:spcPct val="90000"/>
-              </a:lnSpc>
-              <a:spcBef>
-                <a:spcPts val="375"/>
-              </a:spcBef>
-              <a:buFont typeface="Arial" panose="020B0604020202020204" pitchFamily="34" charset="0"/>
-              <a:buChar char="•"/>
-              <a:defRPr sz="1800" kern="1200">
-                <a:solidFill>
-                  <a:schemeClr val="tx1"/>
-                </a:solidFill>
-                <a:latin typeface="+mn-lt"/>
-                <a:ea typeface="+mn-ea"/>
-                <a:cs typeface="+mn-cs"/>
-              </a:defRPr>
-            </a:lvl2pPr>
-            <a:lvl3pPr marL="857250" indent="-171450" algn="l" defTabSz="685800" rtl="0" eaLnBrk="1" latinLnBrk="0" hangingPunct="1">
-              <a:lnSpc>
-                <a:spcPct val="90000"/>
-              </a:lnSpc>
-              <a:spcBef>
-                <a:spcPts val="375"/>
-              </a:spcBef>
-              <a:buFont typeface="Arial" panose="020B0604020202020204" pitchFamily="34" charset="0"/>
-              <a:buChar char="•"/>
-              <a:defRPr sz="1500" kern="1200">
-                <a:solidFill>
-                  <a:schemeClr val="tx1"/>
-                </a:solidFill>
-                <a:latin typeface="+mn-lt"/>
-                <a:ea typeface="+mn-ea"/>
-                <a:cs typeface="+mn-cs"/>
-              </a:defRPr>
-            </a:lvl3pPr>
-            <a:lvl4pPr marL="1200150" indent="-171450" algn="l" defTabSz="685800" rtl="0" eaLnBrk="1" latinLnBrk="0" hangingPunct="1">
-              <a:lnSpc>
-                <a:spcPct val="90000"/>
-              </a:lnSpc>
-              <a:spcBef>
-                <a:spcPts val="375"/>
-              </a:spcBef>
-              <a:buFont typeface="Arial" panose="020B0604020202020204" pitchFamily="34" charset="0"/>
-              <a:buChar char="•"/>
-              <a:defRPr sz="1350" kern="1200">
-                <a:solidFill>
-                  <a:schemeClr val="tx1"/>
-                </a:solidFill>
-                <a:latin typeface="+mn-lt"/>
-                <a:ea typeface="+mn-ea"/>
-                <a:cs typeface="+mn-cs"/>
-              </a:defRPr>
-            </a:lvl4pPr>
-            <a:lvl5pPr marL="1543050" indent="-171450" algn="l" defTabSz="685800" rtl="0" eaLnBrk="1" latinLnBrk="0" hangingPunct="1">
-              <a:lnSpc>
-                <a:spcPct val="90000"/>
-              </a:lnSpc>
-              <a:spcBef>
-                <a:spcPts val="375"/>
-              </a:spcBef>
-              <a:buFont typeface="Arial" panose="020B0604020202020204" pitchFamily="34" charset="0"/>
-              <a:buChar char="•"/>
-              <a:defRPr sz="1350" kern="1200">
-                <a:solidFill>
-                  <a:schemeClr val="tx1"/>
-                </a:solidFill>
-                <a:latin typeface="+mn-lt"/>
-                <a:ea typeface="+mn-ea"/>
-                <a:cs typeface="+mn-cs"/>
-              </a:defRPr>
-            </a:lvl5pPr>
-            <a:lvl6pPr marL="1885950" indent="-171450" algn="l" defTabSz="685800" rtl="0" eaLnBrk="1" latinLnBrk="0" hangingPunct="1">
-              <a:lnSpc>
-                <a:spcPct val="90000"/>
-              </a:lnSpc>
-              <a:spcBef>
-                <a:spcPts val="375"/>
-              </a:spcBef>
-              <a:buFont typeface="Arial" panose="020B0604020202020204" pitchFamily="34" charset="0"/>
-              <a:buChar char="•"/>
-              <a:defRPr sz="1350" kern="1200">
-                <a:solidFill>
-                  <a:schemeClr val="tx1"/>
-                </a:solidFill>
-                <a:latin typeface="+mn-lt"/>
-                <a:ea typeface="+mn-ea"/>
-                <a:cs typeface="+mn-cs"/>
-              </a:defRPr>
-            </a:lvl6pPr>
-            <a:lvl7pPr marL="2228850" indent="-171450" algn="l" defTabSz="685800" rtl="0" eaLnBrk="1" latinLnBrk="0" hangingPunct="1">
-              <a:lnSpc>
-                <a:spcPct val="90000"/>
-              </a:lnSpc>
-              <a:spcBef>
-                <a:spcPts val="375"/>
-              </a:spcBef>
-              <a:buFont typeface="Arial" panose="020B0604020202020204" pitchFamily="34" charset="0"/>
-              <a:buChar char="•"/>
-              <a:defRPr sz="1350" kern="1200">
-                <a:solidFill>
-                  <a:schemeClr val="tx1"/>
-                </a:solidFill>
-                <a:latin typeface="+mn-lt"/>
-                <a:ea typeface="+mn-ea"/>
-                <a:cs typeface="+mn-cs"/>
-              </a:defRPr>
-            </a:lvl7pPr>
-            <a:lvl8pPr marL="2571750" indent="-171450" algn="l" defTabSz="685800" rtl="0" eaLnBrk="1" latinLnBrk="0" hangingPunct="1">
-              <a:lnSpc>
-                <a:spcPct val="90000"/>
-              </a:lnSpc>
-              <a:spcBef>
-                <a:spcPts val="375"/>
-              </a:spcBef>
-              <a:buFont typeface="Arial" panose="020B0604020202020204" pitchFamily="34" charset="0"/>
-              <a:buChar char="•"/>
-              <a:defRPr sz="1350" kern="1200">
-                <a:solidFill>
-                  <a:schemeClr val="tx1"/>
-                </a:solidFill>
-                <a:latin typeface="+mn-lt"/>
-                <a:ea typeface="+mn-ea"/>
-                <a:cs typeface="+mn-cs"/>
-              </a:defRPr>
-            </a:lvl8pPr>
-            <a:lvl9pPr marL="2914650" indent="-171450" algn="l" defTabSz="685800" rtl="0" eaLnBrk="1" latinLnBrk="0" hangingPunct="1">
-              <a:lnSpc>
-                <a:spcPct val="90000"/>
-              </a:lnSpc>
-              <a:spcBef>
-                <a:spcPts val="375"/>
-              </a:spcBef>
-              <a:buFont typeface="Arial" panose="020B0604020202020204" pitchFamily="34" charset="0"/>
-              <a:buChar char="•"/>
-              <a:defRPr sz="1350" kern="1200">
-                <a:solidFill>
-                  <a:schemeClr val="tx1"/>
-                </a:solidFill>
-                <a:latin typeface="+mn-lt"/>
-                <a:ea typeface="+mn-ea"/>
-                <a:cs typeface="+mn-cs"/>
-              </a:defRPr>
-            </a:lvl9pPr>
-          </a:lstStyle>
-          <a:p>
-            <a:pPr marL="0" indent="0">
-              <a:spcBef>
-                <a:spcPts val="1200"/>
-              </a:spcBef>
-              <a:buNone/>
-            </a:pPr>
-            <a:r>
-              <a:rPr lang="sk-SK" sz="2800" dirty="0"/>
-              <a:t>Umožňuje nám vkladať do reťazca premenné.    </a:t>
-            </a:r>
-          </a:p>
-          <a:p>
-            <a:pPr marL="0" indent="0">
-              <a:spcBef>
-                <a:spcPts val="1200"/>
-              </a:spcBef>
-              <a:buNone/>
-            </a:pPr>
-            <a:r>
-              <a:rPr lang="sk-SK" sz="2800" dirty="0"/>
-              <a:t>Príklad: </a:t>
-            </a:r>
-            <a:br>
-              <a:rPr lang="sk-SK" sz="2800" dirty="0"/>
-            </a:br>
-            <a:r>
-              <a:rPr lang="sk-SK" sz="2800" dirty="0" err="1">
-                <a:highlight>
-                  <a:srgbClr val="FFFF00"/>
-                </a:highlight>
-                <a:latin typeface="Consolas" panose="020B0609020204030204" pitchFamily="49" charset="0"/>
-              </a:rPr>
-              <a:t>f"Ahoj</a:t>
-            </a:r>
-            <a:r>
-              <a:rPr lang="sk-SK" sz="2800" dirty="0">
-                <a:highlight>
-                  <a:srgbClr val="FFFF00"/>
-                </a:highlight>
-                <a:latin typeface="Consolas" panose="020B0609020204030204" pitchFamily="49" charset="0"/>
-              </a:rPr>
-              <a:t> {meno} z obce {obec}, rád ťa vidím!"</a:t>
-            </a:r>
-            <a:endParaRPr lang="sk-SK" sz="2800" i="1" dirty="0">
-              <a:highlight>
-                <a:srgbClr val="FFFF00"/>
-              </a:highlight>
-              <a:latin typeface="Consolas" panose="020B0609020204030204" pitchFamily="49" charset="0"/>
-            </a:endParaRPr>
+                <a:solidFill>
+                  <a:srgbClr val="FF0000"/>
+                </a:solidFill>
+                <a:highlight>
+                  <a:srgbClr val="00FFFF"/>
+                </a:highlight>
+              </a:rPr>
+              <a:t>Modré pozadie – poznámka do zošita</a:t>
+            </a:r>
           </a:p>
         </p:txBody>
       </p:sp>
     </p:spTree>
     <p:extLst>
       <p:ext uri="{BB962C8B-B14F-4D97-AF65-F5344CB8AC3E}">
-        <p14:creationId xmlns:p14="http://schemas.microsoft.com/office/powerpoint/2010/main" val="888377853"/>
+        <p14:creationId xmlns:p14="http://schemas.microsoft.com/office/powerpoint/2010/main" val="1676824138"/>
       </p:ext>
     </p:extLst>
   </p:cSld>
@@ -4190,7 +4115,7 @@
 </p:sld>
 </file>
 
-<file path=ppt/slides/slide2.xml><?xml version="1.0" encoding="utf-8"?>
+<file path=ppt/slides/slide3.xml><?xml version="1.0" encoding="utf-8"?>
 <p:sld xmlns:a="http://schemas.openxmlformats.org/drawingml/2006/main" xmlns:r="http://schemas.openxmlformats.org/officeDocument/2006/relationships" xmlns:p="http://schemas.openxmlformats.org/presentationml/2006/main">
   <p:cSld>
     <p:bg>
@@ -4700,8 +4625,8 @@
         </p:nvSpPr>
         <p:spPr>
           <a:xfrm>
-            <a:off x="5138928" y="1338729"/>
-            <a:ext cx="4795584" cy="4180542"/>
+            <a:off x="5138927" y="1338729"/>
+            <a:ext cx="6315649" cy="4180542"/>
           </a:xfrm>
         </p:spPr>
         <p:txBody>
@@ -4781,30 +4706,8 @@
             </a:pPr>
             <a:r>
               <a:rPr lang="sk-SK" dirty="0"/>
-              <a:t>Premenné a konštanty</a:t>
-            </a:r>
-          </a:p>
-          <a:p>
-            <a:pPr marL="514350" indent="-514350">
-              <a:buFont typeface="+mj-lt"/>
-              <a:buAutoNum type="arabicPeriod"/>
-            </a:pPr>
-            <a:r>
-              <a:rPr lang="sk-SK" dirty="0"/>
-              <a:t>Vstup a výstup, </a:t>
-            </a:r>
-            <a:br>
-              <a:rPr lang="sk-SK" dirty="0"/>
-            </a:br>
-            <a:r>
-              <a:rPr lang="sk-SK" dirty="0"/>
-              <a:t>f-</a:t>
-            </a:r>
-            <a:r>
-              <a:rPr lang="sk-SK" dirty="0" err="1"/>
-              <a:t>stringy</a:t>
-            </a:r>
-            <a:endParaRPr lang="sk-SK" dirty="0"/>
+              <a:t>Opakovanie</a:t>
+            </a:r>
           </a:p>
         </p:txBody>
       </p:sp>
@@ -4821,7 +4724,7 @@
 </p:sld>
 </file>
 
-<file path=ppt/slides/slide3.xml><?xml version="1.0" encoding="utf-8"?>
+<file path=ppt/slides/slide4.xml><?xml version="1.0" encoding="utf-8"?>
 <p:sld xmlns:a="http://schemas.openxmlformats.org/drawingml/2006/main" xmlns:r="http://schemas.openxmlformats.org/officeDocument/2006/relationships" xmlns:p="http://schemas.openxmlformats.org/presentationml/2006/main">
   <p:cSld>
     <p:bg>
@@ -4921,10 +4824,10 @@
           <p:nvPr/>
         </p:nvPicPr>
         <p:blipFill>
-          <a:blip r:embed="rId2">
+          <a:blip>
             <a:extLst>
               <a:ext uri="{96DAC541-7B7A-43D3-8B79-37D633B846F1}">
-                <asvg:svgBlip xmlns:asvg="http://schemas.microsoft.com/office/drawing/2016/SVG/main" r:embed="rId3"/>
+                <asvg:svgBlip xmlns:asvg="http://schemas.microsoft.com/office/drawing/2016/SVG/main" r:embed="rId2"/>
               </a:ext>
             </a:extLst>
           </a:blip>
@@ -5104,10 +5007,24 @@
               <a:t>Jazyk </a:t>
             </a:r>
             <a:r>
-              <a:rPr lang="sk-SK" sz="4000" dirty="0" err="1"/>
+              <a:rPr lang="sk-SK" sz="4000" dirty="0" err="1">
+                <a:solidFill>
+                  <a:srgbClr val="FF0000"/>
+                </a:solidFill>
+                <a:highlight>
+                  <a:srgbClr val="00FFFF"/>
+                </a:highlight>
+              </a:rPr>
               <a:t>Python</a:t>
             </a:r>
-            <a:endParaRPr lang="sk-SK" sz="4000" dirty="0"/>
+            <a:endParaRPr lang="sk-SK" sz="4000" dirty="0">
+              <a:solidFill>
+                <a:srgbClr val="FF0000"/>
+              </a:solidFill>
+              <a:highlight>
+                <a:srgbClr val="00FFFF"/>
+              </a:highlight>
+            </a:endParaRPr>
           </a:p>
         </p:txBody>
       </p:sp>
@@ -5143,64 +5060,129 @@
               <a:buNone/>
             </a:pPr>
             <a:r>
-              <a:rPr lang="fr-FR" dirty="0" err="1"/>
+              <a:rPr lang="fr-FR" dirty="0" err="1">
+                <a:solidFill>
+                  <a:srgbClr val="FF0000"/>
+                </a:solidFill>
+                <a:highlight>
+                  <a:srgbClr val="00FFFF"/>
+                </a:highlight>
+              </a:rPr>
               <a:t>Vlastnosti</a:t>
             </a:r>
             <a:r>
-              <a:rPr lang="fr-FR" dirty="0"/>
+              <a:rPr lang="fr-FR" dirty="0">
+                <a:solidFill>
+                  <a:srgbClr val="FF0000"/>
+                </a:solidFill>
+                <a:highlight>
+                  <a:srgbClr val="00FFFF"/>
+                </a:highlight>
+              </a:rPr>
               <a:t>:</a:t>
             </a:r>
           </a:p>
           <a:p>
             <a:pPr lvl="1"/>
             <a:r>
-              <a:rPr lang="fr-FR" sz="2800" dirty="0" err="1"/>
+              <a:rPr lang="fr-FR" sz="2800" dirty="0">
+                <a:solidFill>
+                  <a:srgbClr val="FF0000"/>
+                </a:solidFill>
+                <a:highlight>
+                  <a:srgbClr val="00FFFF"/>
+                </a:highlight>
+              </a:rPr>
               <a:t>interpretovaný</a:t>
             </a:r>
-            <a:r>
-              <a:rPr lang="fr-FR" sz="2800" dirty="0"/>
+          </a:p>
+          <a:p>
+            <a:pPr lvl="1"/>
+            <a:r>
+              <a:rPr lang="fr-FR" sz="2800" dirty="0" err="1">
+                <a:solidFill>
+                  <a:srgbClr val="FF0000"/>
+                </a:solidFill>
+                <a:highlight>
+                  <a:srgbClr val="00FFFF"/>
+                </a:highlight>
+              </a:rPr>
+              <a:t>všeobecné</a:t>
+            </a:r>
+            <a:r>
+              <a:rPr lang="fr-FR" sz="2800" dirty="0">
+                <a:solidFill>
+                  <a:srgbClr val="FF0000"/>
+                </a:solidFill>
+                <a:highlight>
+                  <a:srgbClr val="00FFFF"/>
+                </a:highlight>
+              </a:rPr>
               <a:t> </a:t>
             </a:r>
             <a:r>
-              <a:rPr lang="fr-FR" sz="2800" dirty="0" err="1"/>
-              <a:t>jazyk</a:t>
-            </a:r>
-            <a:r>
-              <a:rPr lang="fr-FR" sz="2800" dirty="0"/>
+              <a:rPr lang="fr-FR" sz="2800" dirty="0" err="1">
+                <a:solidFill>
+                  <a:srgbClr val="FF0000"/>
+                </a:solidFill>
+                <a:highlight>
+                  <a:srgbClr val="00FFFF"/>
+                </a:highlight>
+              </a:rPr>
+              <a:t>použitie</a:t>
+            </a:r>
+            <a:endParaRPr lang="fr-FR" sz="2800" dirty="0">
+              <a:solidFill>
+                <a:srgbClr val="FF0000"/>
+              </a:solidFill>
+              <a:highlight>
+                <a:srgbClr val="00FFFF"/>
+              </a:highlight>
+            </a:endParaRPr>
+          </a:p>
+          <a:p>
+            <a:pPr lvl="1"/>
+            <a:r>
+              <a:rPr lang="fr-FR" sz="2800" dirty="0" err="1">
+                <a:solidFill>
+                  <a:srgbClr val="FF0000"/>
+                </a:solidFill>
+                <a:highlight>
+                  <a:srgbClr val="00FFFF"/>
+                </a:highlight>
+              </a:rPr>
+              <a:t>dynamické</a:t>
+            </a:r>
+            <a:r>
+              <a:rPr lang="fr-FR" sz="2800" dirty="0">
+                <a:solidFill>
+                  <a:srgbClr val="FF0000"/>
+                </a:solidFill>
+                <a:highlight>
+                  <a:srgbClr val="00FFFF"/>
+                </a:highlight>
+              </a:rPr>
               <a:t> </a:t>
             </a:r>
-          </a:p>
-          <a:p>
-            <a:pPr lvl="1"/>
-            <a:r>
-              <a:rPr lang="fr-FR" sz="2800" dirty="0" err="1"/>
-              <a:t>všeobecné</a:t>
-            </a:r>
-            <a:r>
-              <a:rPr lang="fr-FR" sz="2800" dirty="0"/>
-              <a:t> </a:t>
-            </a:r>
-            <a:r>
-              <a:rPr lang="fr-FR" sz="2800" dirty="0" err="1"/>
-              <a:t>použitie</a:t>
-            </a:r>
-            <a:endParaRPr lang="fr-FR" sz="2800" dirty="0"/>
-          </a:p>
-          <a:p>
-            <a:pPr lvl="1"/>
-            <a:r>
-              <a:rPr lang="fr-FR" sz="2800" dirty="0" err="1"/>
-              <a:t>dynamické</a:t>
-            </a:r>
-            <a:r>
-              <a:rPr lang="fr-FR" sz="2800" dirty="0"/>
-              <a:t> </a:t>
-            </a:r>
-            <a:r>
-              <a:rPr lang="fr-FR" sz="2800" dirty="0" err="1"/>
+            <a:r>
+              <a:rPr lang="fr-FR" sz="2800" dirty="0" err="1">
+                <a:solidFill>
+                  <a:srgbClr val="FF0000"/>
+                </a:solidFill>
+                <a:highlight>
+                  <a:srgbClr val="00FFFF"/>
+                </a:highlight>
+              </a:rPr>
               <a:t>typovanie</a:t>
             </a:r>
-            <a:endParaRPr lang="sk-SK" sz="2800" dirty="0"/>
+            <a:endParaRPr lang="sk-SK" sz="2800" dirty="0">
+              <a:solidFill>
+                <a:srgbClr val="FF0000"/>
+              </a:solidFill>
+              <a:highlight>
+                <a:srgbClr val="00FFFF"/>
+              </a:highlight>
+            </a:endParaRPr>
           </a:p>
           <a:p>
             <a:pPr marL="0" indent="0">
@@ -5208,7 +5190,7 @@
             </a:pPr>
             <a:r>
               <a:rPr lang="sk-SK" dirty="0">
-                <a:hlinkClick r:id="rId4"/>
+                <a:hlinkClick r:id="rId3"/>
               </a:rPr>
               <a:t>https://www.python.org/downloads/</a:t>
             </a:r>
@@ -5232,7 +5214,7 @@
 </p:sld>
 </file>
 
-<file path=ppt/slides/slide4.xml><?xml version="1.0" encoding="utf-8"?>
+<file path=ppt/slides/slide5.xml><?xml version="1.0" encoding="utf-8"?>
 <p:sld xmlns:a="http://schemas.openxmlformats.org/drawingml/2006/main" xmlns:r="http://schemas.openxmlformats.org/officeDocument/2006/relationships" xmlns:p="http://schemas.openxmlformats.org/presentationml/2006/main">
   <p:cSld>
     <p:bg>
@@ -5767,78 +5749,88 @@
               <a:buNone/>
             </a:pPr>
             <a:r>
-              <a:rPr lang="fr-FR" dirty="0" err="1"/>
+              <a:rPr lang="fr-FR" dirty="0" err="1">
+                <a:solidFill>
+                  <a:srgbClr val="FF0000"/>
+                </a:solidFill>
+                <a:highlight>
+                  <a:srgbClr val="00FFFF"/>
+                </a:highlight>
+              </a:rPr>
               <a:t>Použitie</a:t>
             </a:r>
             <a:r>
-              <a:rPr lang="fr-FR" dirty="0"/>
+              <a:rPr lang="fr-FR" dirty="0">
+                <a:solidFill>
+                  <a:srgbClr val="FF0000"/>
+                </a:solidFill>
+                <a:highlight>
+                  <a:srgbClr val="00FFFF"/>
+                </a:highlight>
+              </a:rPr>
               <a:t>:</a:t>
             </a:r>
           </a:p>
           <a:p>
             <a:pPr lvl="1"/>
             <a:r>
-              <a:rPr lang="fr-FR" sz="2800" dirty="0" err="1"/>
+              <a:rPr lang="fr-FR" sz="2800" dirty="0" err="1">
+                <a:solidFill>
+                  <a:srgbClr val="FF0000"/>
+                </a:solidFill>
+                <a:highlight>
+                  <a:srgbClr val="00FFFF"/>
+                </a:highlight>
+              </a:rPr>
               <a:t>umelá</a:t>
             </a:r>
             <a:r>
-              <a:rPr lang="fr-FR" sz="2800" dirty="0"/>
+              <a:rPr lang="fr-FR" sz="2800" dirty="0">
+                <a:solidFill>
+                  <a:srgbClr val="FF0000"/>
+                </a:solidFill>
+                <a:highlight>
+                  <a:srgbClr val="00FFFF"/>
+                </a:highlight>
+              </a:rPr>
               <a:t> </a:t>
             </a:r>
             <a:r>
-              <a:rPr lang="fr-FR" sz="2800" dirty="0" err="1"/>
+              <a:rPr lang="fr-FR" sz="2800" dirty="0" err="1">
+                <a:solidFill>
+                  <a:srgbClr val="FF0000"/>
+                </a:solidFill>
+                <a:highlight>
+                  <a:srgbClr val="00FFFF"/>
+                </a:highlight>
+              </a:rPr>
               <a:t>inteligencia</a:t>
             </a:r>
-            <a:endParaRPr lang="fr-FR" sz="2800" dirty="0"/>
+            <a:endParaRPr lang="fr-FR" sz="2800" dirty="0">
+              <a:solidFill>
+                <a:srgbClr val="FF0000"/>
+              </a:solidFill>
+              <a:highlight>
+                <a:srgbClr val="00FFFF"/>
+              </a:highlight>
+            </a:endParaRPr>
           </a:p>
           <a:p>
             <a:pPr lvl="1"/>
             <a:r>
-              <a:rPr lang="fr-FR" sz="2800" dirty="0" err="1"/>
-              <a:t>strojové</a:t>
-            </a:r>
-            <a:r>
-              <a:rPr lang="fr-FR" sz="2800" dirty="0"/>
-              <a:t> </a:t>
-            </a:r>
-            <a:r>
-              <a:rPr lang="fr-FR" sz="2800" dirty="0" err="1"/>
-              <a:t>učenie</a:t>
-            </a:r>
-            <a:endParaRPr lang="fr-FR" sz="2800" dirty="0"/>
+              <a:rPr lang="fr-FR" sz="2800" dirty="0">
+                <a:solidFill>
+                  <a:srgbClr val="FF0000"/>
+                </a:solidFill>
+                <a:highlight>
+                  <a:srgbClr val="00FFFF"/>
+                </a:highlight>
+              </a:rPr>
+              <a:t>dátová analytika</a:t>
+            </a:r>
           </a:p>
           <a:p>
             <a:pPr lvl="1"/>
-            <a:r>
-              <a:rPr lang="fr-FR" sz="2800" dirty="0" err="1"/>
-              <a:t>dátová</a:t>
-            </a:r>
-            <a:r>
-              <a:rPr lang="fr-FR" sz="2800" dirty="0"/>
-              <a:t> </a:t>
-            </a:r>
-            <a:r>
-              <a:rPr lang="fr-FR" sz="2800" dirty="0" err="1"/>
-              <a:t>analytika</a:t>
-            </a:r>
-            <a:r>
-              <a:rPr lang="fr-FR" sz="2800" dirty="0"/>
-              <a:t> a </a:t>
-            </a:r>
-            <a:r>
-              <a:rPr lang="fr-FR" sz="2800" dirty="0" err="1"/>
-              <a:t>dátová</a:t>
-            </a:r>
-            <a:r>
-              <a:rPr lang="fr-FR" sz="2800" dirty="0"/>
-              <a:t> veda</a:t>
-            </a:r>
-            <a:endParaRPr lang="sk-SK" sz="2800" dirty="0"/>
-          </a:p>
-          <a:p>
-            <a:pPr marL="342900" lvl="1" indent="0">
-              <a:buNone/>
-            </a:pPr>
             <a:endParaRPr lang="sk-SK" sz="2800" dirty="0"/>
           </a:p>
           <a:p>
@@ -5872,7 +5864,7 @@
 </p:sld>
 </file>
 
-<file path=ppt/slides/slide5.xml><?xml version="1.0" encoding="utf-8"?>
+<file path=ppt/slides/slide6.xml><?xml version="1.0" encoding="utf-8"?>
 <p:sld xmlns:a="http://schemas.openxmlformats.org/drawingml/2006/main" xmlns:r="http://schemas.openxmlformats.org/officeDocument/2006/relationships" xmlns:p="http://schemas.openxmlformats.org/presentationml/2006/main">
   <p:cSld>
     <p:bg>
@@ -5927,18 +5919,46 @@
           <a:lstStyle/>
           <a:p>
             <a:r>
-              <a:rPr lang="sk-SK" sz="4000" dirty="0" err="1"/>
+              <a:rPr lang="sk-SK" sz="4000" dirty="0" err="1">
+                <a:solidFill>
+                  <a:srgbClr val="FF0000"/>
+                </a:solidFill>
+                <a:highlight>
+                  <a:srgbClr val="00FFFF"/>
+                </a:highlight>
+              </a:rPr>
               <a:t>Semantic</a:t>
             </a:r>
             <a:r>
-              <a:rPr lang="sk-SK" sz="4000" dirty="0"/>
+              <a:rPr lang="sk-SK" sz="4000" dirty="0">
+                <a:solidFill>
+                  <a:srgbClr val="FF0000"/>
+                </a:solidFill>
+                <a:highlight>
+                  <a:srgbClr val="00FFFF"/>
+                </a:highlight>
+              </a:rPr>
               <a:t> </a:t>
             </a:r>
             <a:r>
-              <a:rPr lang="sk-SK" sz="4000" dirty="0" err="1"/>
+              <a:rPr lang="sk-SK" sz="4000" dirty="0" err="1">
+                <a:solidFill>
+                  <a:srgbClr val="FF0000"/>
+                </a:solidFill>
+                <a:highlight>
+                  <a:srgbClr val="00FFFF"/>
+                </a:highlight>
+              </a:rPr>
               <a:t>versioning</a:t>
             </a:r>
-            <a:endParaRPr lang="sk-SK" sz="4000" dirty="0"/>
+            <a:endParaRPr lang="sk-SK" sz="4000" dirty="0">
+              <a:solidFill>
+                <a:srgbClr val="FF0000"/>
+              </a:solidFill>
+              <a:highlight>
+                <a:srgbClr val="00FFFF"/>
+              </a:highlight>
+            </a:endParaRPr>
           </a:p>
         </p:txBody>
       </p:sp>
@@ -5960,8 +5980,8 @@
         </p:nvSpPr>
         <p:spPr>
           <a:xfrm>
-            <a:off x="2068287" y="1845734"/>
-            <a:ext cx="8066314" cy="4217609"/>
+            <a:off x="1229032" y="1845734"/>
+            <a:ext cx="8905569" cy="4217609"/>
           </a:xfrm>
         </p:spPr>
         <p:txBody>
@@ -6001,7 +6021,14 @@
               <a:t> </a:t>
             </a:r>
             <a:r>
-              <a:rPr lang="fr-FR" sz="2800" i="1" dirty="0"/>
+              <a:rPr lang="fr-FR" sz="2800" i="1" dirty="0">
+                <a:solidFill>
+                  <a:srgbClr val="FF0000"/>
+                </a:solidFill>
+                <a:highlight>
+                  <a:srgbClr val="00FFFF"/>
+                </a:highlight>
+              </a:rPr>
               <a:t>MAJOR.MINOR.PATCH</a:t>
             </a:r>
           </a:p>
@@ -6061,25 +6088,47 @@
               <a:buNone/>
             </a:pPr>
             <a:r>
-              <a:rPr lang="fr-FR" sz="2800" dirty="0" err="1"/>
-              <a:t>Príklad</a:t>
-            </a:r>
-            <a:r>
-              <a:rPr lang="fr-FR" sz="2800" dirty="0"/>
-              <a:t>: </a:t>
-            </a:r>
-            <a:r>
               <a:rPr lang="fr-FR" sz="2800" dirty="0">
+                <a:solidFill>
+                  <a:srgbClr val="FF0000"/>
+                </a:solidFill>
+                <a:highlight>
+                  <a:srgbClr val="00FFFF"/>
+                </a:highlight>
+              </a:rPr>
+              <a:t>Príklad: </a:t>
+            </a:r>
+            <a:r>
+              <a:rPr lang="fr-FR" sz="2800" dirty="0">
+                <a:solidFill>
+                  <a:srgbClr val="FF0000"/>
+                </a:solidFill>
+                <a:highlight>
+                  <a:srgbClr val="00FFFF"/>
+                </a:highlight>
                 <a:latin typeface="Consolas" panose="020B0609020204030204" pitchFamily="49" charset="0"/>
               </a:rPr>
               <a:t>3.13.7</a:t>
             </a:r>
             <a:r>
-              <a:rPr lang="fr-FR" sz="2800" dirty="0"/>
-              <a:t>, </a:t>
-            </a:r>
-            <a:r>
               <a:rPr lang="fr-FR" sz="2800" dirty="0">
+                <a:solidFill>
+                  <a:srgbClr val="FF0000"/>
+                </a:solidFill>
+                <a:highlight>
+                  <a:srgbClr val="00FFFF"/>
+                </a:highlight>
+              </a:rPr>
+              <a:t>,  </a:t>
+            </a:r>
+            <a:r>
+              <a:rPr lang="fr-FR" sz="2800" dirty="0">
+                <a:solidFill>
+                  <a:srgbClr val="FF0000"/>
+                </a:solidFill>
+                <a:highlight>
+                  <a:srgbClr val="00FFFF"/>
+                </a:highlight>
                 <a:latin typeface="Consolas" panose="020B0609020204030204" pitchFamily="49" charset="0"/>
               </a:rPr>
               <a:t>1.0.0</a:t>
@@ -6092,42 +6141,27 @@
               </a:spcBef>
             </a:pPr>
             <a:r>
-              <a:rPr lang="fr-FR" sz="2800" i="1" dirty="0"/>
+              <a:rPr lang="fr-FR" sz="2800" i="1" dirty="0">
+                <a:solidFill>
+                  <a:srgbClr val="FF0000"/>
+                </a:solidFill>
+                <a:highlight>
+                  <a:srgbClr val="00FFFF"/>
+                </a:highlight>
+              </a:rPr>
               <a:t>MAJOR</a:t>
             </a:r>
             <a:r>
-              <a:rPr lang="fr-FR" sz="2800" dirty="0"/>
-              <a:t> sa </a:t>
-            </a:r>
-            <a:r>
-              <a:rPr lang="fr-FR" sz="2800" dirty="0" err="1"/>
-              <a:t>zvýši</a:t>
-            </a:r>
-            <a:r>
-              <a:rPr lang="fr-FR" sz="2800" dirty="0"/>
-              <a:t>: </a:t>
-            </a:r>
-            <a:r>
-              <a:rPr lang="fr-FR" sz="2800" dirty="0" err="1"/>
-              <a:t>veľké</a:t>
-            </a:r>
-            <a:r>
-              <a:rPr lang="fr-FR" sz="2800" dirty="0"/>
-              <a:t> a </a:t>
-            </a:r>
-            <a:r>
-              <a:rPr lang="fr-FR" sz="2800" dirty="0" err="1"/>
-              <a:t>nekompatibilné</a:t>
-            </a:r>
-            <a:r>
-              <a:rPr lang="fr-FR" sz="2800" dirty="0"/>
-              <a:t> </a:t>
-            </a:r>
-            <a:r>
-              <a:rPr lang="fr-FR" sz="2800" dirty="0" err="1"/>
-              <a:t>zmeny</a:t>
-            </a:r>
-            <a:endParaRPr lang="fr-FR" sz="2800" dirty="0"/>
+              <a:rPr lang="fr-FR" sz="2800" dirty="0">
+                <a:solidFill>
+                  <a:srgbClr val="FF0000"/>
+                </a:solidFill>
+                <a:highlight>
+                  <a:srgbClr val="00FFFF"/>
+                </a:highlight>
+              </a:rPr>
+              <a:t>: veľké a nekompatibilné zmeny</a:t>
+            </a:r>
           </a:p>
           <a:p>
             <a:pPr lvl="1">
@@ -6136,50 +6170,27 @@
               </a:spcBef>
             </a:pPr>
             <a:r>
-              <a:rPr lang="fr-FR" sz="2800" i="1" dirty="0"/>
+              <a:rPr lang="fr-FR" sz="2800" i="1" dirty="0">
+                <a:solidFill>
+                  <a:srgbClr val="FF0000"/>
+                </a:solidFill>
+                <a:highlight>
+                  <a:srgbClr val="00FFFF"/>
+                </a:highlight>
+              </a:rPr>
               <a:t>MINOR</a:t>
             </a:r>
             <a:r>
-              <a:rPr lang="fr-FR" sz="2800" dirty="0"/>
-              <a:t> sa </a:t>
-            </a:r>
-            <a:r>
-              <a:rPr lang="fr-FR" sz="2800" dirty="0" err="1"/>
-              <a:t>zvýši</a:t>
-            </a:r>
-            <a:r>
-              <a:rPr lang="fr-FR" sz="2800" dirty="0"/>
-              <a:t>: </a:t>
-            </a:r>
-            <a:r>
-              <a:rPr lang="fr-FR" sz="2800" dirty="0" err="1"/>
-              <a:t>nová</a:t>
-            </a:r>
-            <a:r>
-              <a:rPr lang="fr-FR" sz="2800" dirty="0"/>
-              <a:t> </a:t>
-            </a:r>
-            <a:r>
-              <a:rPr lang="fr-FR" sz="2800" dirty="0" err="1"/>
-              <a:t>funkcionalita</a:t>
-            </a:r>
-            <a:r>
-              <a:rPr lang="fr-FR" sz="2800" dirty="0"/>
-              <a:t>, </a:t>
-            </a:r>
-            <a:r>
-              <a:rPr lang="fr-FR" sz="2800" dirty="0" err="1"/>
-              <a:t>spätne</a:t>
-            </a:r>
-            <a:r>
-              <a:rPr lang="fr-FR" sz="2800" dirty="0"/>
-              <a:t> </a:t>
-            </a:r>
-            <a:r>
-              <a:rPr lang="fr-FR" sz="2800" dirty="0" err="1"/>
-              <a:t>kompatibilná</a:t>
-            </a:r>
-            <a:endParaRPr lang="fr-FR" sz="2800" dirty="0"/>
+              <a:rPr lang="fr-FR" sz="2800" dirty="0">
+                <a:solidFill>
+                  <a:srgbClr val="FF0000"/>
+                </a:solidFill>
+                <a:highlight>
+                  <a:srgbClr val="00FFFF"/>
+                </a:highlight>
+              </a:rPr>
+              <a:t>: nová funkcionalita, spätne kompatibilná</a:t>
+            </a:r>
           </a:p>
           <a:p>
             <a:pPr lvl="1">
@@ -6188,50 +6199,35 @@
               </a:spcBef>
             </a:pPr>
             <a:r>
-              <a:rPr lang="fr-FR" sz="2800" i="1" dirty="0"/>
-              <a:t>PATCH </a:t>
-            </a:r>
-            <a:r>
-              <a:rPr lang="fr-FR" sz="2800" dirty="0"/>
-              <a:t>sa </a:t>
-            </a:r>
-            <a:r>
-              <a:rPr lang="fr-FR" sz="2800" dirty="0" err="1"/>
-              <a:t>zvýši</a:t>
-            </a:r>
-            <a:r>
-              <a:rPr lang="fr-FR" sz="2800" dirty="0"/>
-              <a:t>: </a:t>
-            </a:r>
-            <a:r>
-              <a:rPr lang="fr-FR" sz="2800" dirty="0" err="1"/>
-              <a:t>oprava</a:t>
-            </a:r>
-            <a:r>
-              <a:rPr lang="fr-FR" sz="2800" dirty="0"/>
-              <a:t> </a:t>
-            </a:r>
-            <a:r>
-              <a:rPr lang="fr-FR" sz="2800" dirty="0" err="1"/>
-              <a:t>chýb</a:t>
-            </a:r>
-            <a:r>
-              <a:rPr lang="fr-FR" sz="2800" dirty="0"/>
-              <a:t>, </a:t>
-            </a:r>
-            <a:r>
-              <a:rPr lang="fr-FR" sz="2800" dirty="0" err="1"/>
-              <a:t>spätne</a:t>
-            </a:r>
-            <a:r>
-              <a:rPr lang="fr-FR" sz="2800" dirty="0"/>
-              <a:t> </a:t>
-            </a:r>
-            <a:r>
-              <a:rPr lang="fr-FR" sz="2800" dirty="0" err="1"/>
-              <a:t>kompatibiliná</a:t>
-            </a:r>
-            <a:endParaRPr lang="sk-SK" sz="2800" i="1" dirty="0"/>
+              <a:rPr lang="fr-FR" sz="2800" i="1" dirty="0">
+                <a:solidFill>
+                  <a:srgbClr val="FF0000"/>
+                </a:solidFill>
+                <a:highlight>
+                  <a:srgbClr val="00FFFF"/>
+                </a:highlight>
+              </a:rPr>
+              <a:t>PATCH</a:t>
+            </a:r>
+            <a:r>
+              <a:rPr lang="fr-FR" sz="2800" dirty="0">
+                <a:solidFill>
+                  <a:srgbClr val="FF0000"/>
+                </a:solidFill>
+                <a:highlight>
+                  <a:srgbClr val="00FFFF"/>
+                </a:highlight>
+              </a:rPr>
+              <a:t>: oprava chýb</a:t>
+            </a:r>
+            <a:endParaRPr lang="sk-SK" sz="2800" i="1" dirty="0">
+              <a:solidFill>
+                <a:srgbClr val="FF0000"/>
+              </a:solidFill>
+              <a:highlight>
+                <a:srgbClr val="00FFFF"/>
+              </a:highlight>
+            </a:endParaRPr>
           </a:p>
         </p:txBody>
       </p:sp>
@@ -6248,7 +6244,7 @@
 </p:sld>
 </file>
 
-<file path=ppt/slides/slide6.xml><?xml version="1.0" encoding="utf-8"?>
+<file path=ppt/slides/slide7.xml><?xml version="1.0" encoding="utf-8"?>
 <p:sld xmlns:a="http://schemas.openxmlformats.org/drawingml/2006/main" xmlns:r="http://schemas.openxmlformats.org/officeDocument/2006/relationships" xmlns:p="http://schemas.openxmlformats.org/presentationml/2006/main">
   <p:cSld>
     <p:bg>
@@ -6685,15 +6681,36 @@
           <a:p>
             <a:pPr algn="r"/>
             <a:r>
-              <a:rPr lang="sk-SK" sz="4000" dirty="0"/>
+              <a:rPr lang="sk-SK" sz="4000" dirty="0">
+                <a:solidFill>
+                  <a:srgbClr val="FF0000"/>
+                </a:solidFill>
+                <a:highlight>
+                  <a:srgbClr val="00FFFF"/>
+                </a:highlight>
+              </a:rPr>
               <a:t>Kompilovaný </a:t>
             </a:r>
             <a:r>
-              <a:rPr lang="sk-SK" sz="4000" dirty="0" err="1"/>
+              <a:rPr lang="sk-SK" sz="4000" dirty="0" err="1">
+                <a:solidFill>
+                  <a:srgbClr val="FF0000"/>
+                </a:solidFill>
+                <a:highlight>
+                  <a:srgbClr val="00FFFF"/>
+                </a:highlight>
+              </a:rPr>
               <a:t>vs</a:t>
             </a:r>
             <a:r>
-              <a:rPr lang="sk-SK" sz="4000" dirty="0"/>
+              <a:rPr lang="sk-SK" sz="4000" dirty="0">
+                <a:solidFill>
+                  <a:srgbClr val="FF0000"/>
+                </a:solidFill>
+                <a:highlight>
+                  <a:srgbClr val="00FFFF"/>
+                </a:highlight>
+              </a:rPr>
               <a:t> Interpretovaný jazyk</a:t>
             </a:r>
           </a:p>
@@ -6789,19 +6806,47 @@
               <a:buNone/>
             </a:pPr>
             <a:r>
-              <a:rPr lang="fr-FR" sz="3200" dirty="0" err="1"/>
+              <a:rPr lang="fr-FR" sz="3200" dirty="0" err="1">
+                <a:solidFill>
+                  <a:srgbClr val="FF0000"/>
+                </a:solidFill>
+                <a:highlight>
+                  <a:srgbClr val="00FFFF"/>
+                </a:highlight>
+              </a:rPr>
               <a:t>Interpretovaný</a:t>
             </a:r>
             <a:r>
-              <a:rPr lang="fr-FR" sz="3200" dirty="0"/>
+              <a:rPr lang="fr-FR" sz="3200" dirty="0">
+                <a:solidFill>
+                  <a:srgbClr val="FF0000"/>
+                </a:solidFill>
+                <a:highlight>
+                  <a:srgbClr val="00FFFF"/>
+                </a:highlight>
+              </a:rPr>
               <a:t> </a:t>
             </a:r>
             <a:r>
-              <a:rPr lang="fr-FR" sz="3200" dirty="0" err="1"/>
+              <a:rPr lang="fr-FR" sz="3200" dirty="0" err="1">
+                <a:solidFill>
+                  <a:srgbClr val="FF0000"/>
+                </a:solidFill>
+                <a:highlight>
+                  <a:srgbClr val="00FFFF"/>
+                </a:highlight>
+              </a:rPr>
               <a:t>jazyk</a:t>
             </a:r>
             <a:r>
-              <a:rPr lang="fr-FR" sz="3200" dirty="0"/>
+              <a:rPr lang="fr-FR" sz="3200" dirty="0">
+                <a:solidFill>
+                  <a:srgbClr val="FF0000"/>
+                </a:solidFill>
+                <a:highlight>
+                  <a:srgbClr val="00FFFF"/>
+                </a:highlight>
+              </a:rPr>
               <a:t>: </a:t>
             </a:r>
           </a:p>
@@ -6812,26 +6857,68 @@
               </a:spcBef>
             </a:pPr>
             <a:r>
-              <a:rPr lang="fr-FR" sz="3200" dirty="0" err="1"/>
+              <a:rPr lang="fr-FR" sz="3200" dirty="0" err="1">
+                <a:solidFill>
+                  <a:srgbClr val="FF0000"/>
+                </a:solidFill>
+                <a:highlight>
+                  <a:srgbClr val="00FFFF"/>
+                </a:highlight>
+              </a:rPr>
               <a:t>interaktívny</a:t>
             </a:r>
             <a:r>
-              <a:rPr lang="fr-FR" sz="3200" dirty="0"/>
+              <a:rPr lang="fr-FR" sz="3200" dirty="0">
+                <a:solidFill>
+                  <a:srgbClr val="FF0000"/>
+                </a:solidFill>
+                <a:highlight>
+                  <a:srgbClr val="00FFFF"/>
+                </a:highlight>
+              </a:rPr>
               <a:t>, </a:t>
             </a:r>
             <a:r>
-              <a:rPr lang="fr-FR" sz="3200" dirty="0" err="1"/>
+              <a:rPr lang="fr-FR" sz="3200" dirty="0" err="1">
+                <a:solidFill>
+                  <a:srgbClr val="FF0000"/>
+                </a:solidFill>
+                <a:highlight>
+                  <a:srgbClr val="00FFFF"/>
+                </a:highlight>
+              </a:rPr>
               <a:t>skriptovací</a:t>
             </a:r>
             <a:r>
-              <a:rPr lang="fr-FR" sz="3200" dirty="0"/>
+              <a:rPr lang="fr-FR" sz="3200" dirty="0">
+                <a:solidFill>
+                  <a:srgbClr val="FF0000"/>
+                </a:solidFill>
+                <a:highlight>
+                  <a:srgbClr val="00FFFF"/>
+                </a:highlight>
+              </a:rPr>
               <a:t>, </a:t>
             </a:r>
             <a:r>
-              <a:rPr lang="fr-FR" sz="3200" dirty="0" err="1"/>
+              <a:rPr lang="fr-FR" sz="3200" dirty="0" err="1">
+                <a:solidFill>
+                  <a:srgbClr val="FF0000"/>
+                </a:solidFill>
+                <a:highlight>
+                  <a:srgbClr val="00FFFF"/>
+                </a:highlight>
+              </a:rPr>
               <a:t>pomalší</a:t>
             </a:r>
-            <a:endParaRPr lang="fr-FR" sz="3200" dirty="0"/>
+            <a:endParaRPr lang="fr-FR" sz="3200" dirty="0">
+              <a:solidFill>
+                <a:srgbClr val="FF0000"/>
+              </a:solidFill>
+              <a:highlight>
+                <a:srgbClr val="00FFFF"/>
+              </a:highlight>
+            </a:endParaRPr>
           </a:p>
           <a:p>
             <a:pPr lvl="1">
@@ -6840,18 +6927,46 @@
               </a:spcBef>
             </a:pPr>
             <a:r>
-              <a:rPr lang="fr-FR" sz="3200" dirty="0" err="1"/>
+              <a:rPr lang="fr-FR" sz="3200" dirty="0" err="1">
+                <a:solidFill>
+                  <a:srgbClr val="FF0000"/>
+                </a:solidFill>
+                <a:highlight>
+                  <a:srgbClr val="00FFFF"/>
+                </a:highlight>
+              </a:rPr>
               <a:t>potrebuje</a:t>
             </a:r>
             <a:r>
-              <a:rPr lang="fr-FR" sz="3200" dirty="0"/>
+              <a:rPr lang="fr-FR" sz="3200" dirty="0">
+                <a:solidFill>
+                  <a:srgbClr val="FF0000"/>
+                </a:solidFill>
+                <a:highlight>
+                  <a:srgbClr val="00FFFF"/>
+                </a:highlight>
+              </a:rPr>
               <a:t> </a:t>
             </a:r>
             <a:r>
-              <a:rPr lang="fr-FR" sz="3200" dirty="0" err="1"/>
+              <a:rPr lang="fr-FR" sz="3200" dirty="0" err="1">
+                <a:solidFill>
+                  <a:srgbClr val="FF0000"/>
+                </a:solidFill>
+                <a:highlight>
+                  <a:srgbClr val="00FFFF"/>
+                </a:highlight>
+              </a:rPr>
               <a:t>interpreter</a:t>
             </a:r>
-            <a:endParaRPr lang="fr-FR" sz="3200" dirty="0"/>
+            <a:endParaRPr lang="fr-FR" sz="3200" dirty="0">
+              <a:solidFill>
+                <a:srgbClr val="FF0000"/>
+              </a:solidFill>
+              <a:highlight>
+                <a:srgbClr val="00FFFF"/>
+              </a:highlight>
+            </a:endParaRPr>
           </a:p>
           <a:p>
             <a:pPr lvl="1">
@@ -6860,10 +6975,24 @@
               </a:spcBef>
             </a:pPr>
             <a:r>
-              <a:rPr lang="fr-FR" sz="3200" dirty="0"/>
+              <a:rPr lang="fr-FR" sz="3200" dirty="0">
+                <a:solidFill>
+                  <a:srgbClr val="FF0000"/>
+                </a:solidFill>
+                <a:highlight>
+                  <a:srgbClr val="00FFFF"/>
+                </a:highlight>
+              </a:rPr>
               <a:t>Python, PHP, Javascript</a:t>
             </a:r>
-            <a:endParaRPr lang="sk-SK" sz="3200" i="1" dirty="0"/>
+            <a:endParaRPr lang="sk-SK" sz="3200" i="1" dirty="0">
+              <a:solidFill>
+                <a:srgbClr val="FF0000"/>
+              </a:solidFill>
+              <a:highlight>
+                <a:srgbClr val="00FFFF"/>
+              </a:highlight>
+            </a:endParaRPr>
           </a:p>
         </p:txBody>
       </p:sp>
@@ -6880,7 +7009,7 @@
 </p:sld>
 </file>
 
-<file path=ppt/slides/slide7.xml><?xml version="1.0" encoding="utf-8"?>
+<file path=ppt/slides/slide8.xml><?xml version="1.0" encoding="utf-8"?>
 <p:sld xmlns:a="http://schemas.openxmlformats.org/drawingml/2006/main" xmlns:r="http://schemas.openxmlformats.org/officeDocument/2006/relationships" xmlns:p="http://schemas.openxmlformats.org/presentationml/2006/main">
   <p:cSld>
     <p:bg>
@@ -6967,8 +7096,8 @@
         </p:nvSpPr>
         <p:spPr>
           <a:xfrm>
-            <a:off x="2068287" y="1845734"/>
-            <a:ext cx="8066314" cy="4217609"/>
+            <a:off x="1209368" y="1845734"/>
+            <a:ext cx="10304205" cy="4217609"/>
           </a:xfrm>
         </p:spPr>
         <p:txBody>
@@ -6984,19 +7113,47 @@
               <a:buNone/>
             </a:pPr>
             <a:r>
-              <a:rPr lang="sk-SK" sz="2800" dirty="0"/>
+              <a:rPr lang="sk-SK" sz="2800" dirty="0">
+                <a:solidFill>
+                  <a:srgbClr val="FF0000"/>
+                </a:solidFill>
+                <a:highlight>
+                  <a:srgbClr val="00FFFF"/>
+                </a:highlight>
+              </a:rPr>
               <a:t>Kompilovaný</a:t>
             </a:r>
             <a:r>
-              <a:rPr lang="fr-FR" sz="2800" dirty="0"/>
+              <a:rPr lang="fr-FR" sz="2800" dirty="0">
+                <a:solidFill>
+                  <a:srgbClr val="FF0000"/>
+                </a:solidFill>
+                <a:highlight>
+                  <a:srgbClr val="00FFFF"/>
+                </a:highlight>
+              </a:rPr>
               <a:t> </a:t>
             </a:r>
             <a:r>
-              <a:rPr lang="fr-FR" sz="2800" dirty="0" err="1"/>
+              <a:rPr lang="fr-FR" sz="2800" dirty="0" err="1">
+                <a:solidFill>
+                  <a:srgbClr val="FF0000"/>
+                </a:solidFill>
+                <a:highlight>
+                  <a:srgbClr val="00FFFF"/>
+                </a:highlight>
+              </a:rPr>
               <a:t>jazyk</a:t>
             </a:r>
             <a:r>
-              <a:rPr lang="fr-FR" sz="2800" dirty="0"/>
+              <a:rPr lang="fr-FR" sz="2800" dirty="0">
+                <a:solidFill>
+                  <a:srgbClr val="FF0000"/>
+                </a:solidFill>
+                <a:highlight>
+                  <a:srgbClr val="00FFFF"/>
+                </a:highlight>
+              </a:rPr>
               <a:t>: </a:t>
             </a:r>
           </a:p>
@@ -7007,42 +7164,112 @@
               </a:spcBef>
             </a:pPr>
             <a:r>
-              <a:rPr lang="fr-FR" sz="2800" dirty="0" err="1"/>
+              <a:rPr lang="fr-FR" sz="2800" dirty="0" err="1">
+                <a:solidFill>
+                  <a:srgbClr val="FF0000"/>
+                </a:solidFill>
+                <a:highlight>
+                  <a:srgbClr val="00FFFF"/>
+                </a:highlight>
+              </a:rPr>
               <a:t>rýchly</a:t>
             </a:r>
             <a:r>
-              <a:rPr lang="fr-FR" sz="2800" dirty="0"/>
+              <a:rPr lang="fr-FR" sz="2800" dirty="0">
+                <a:solidFill>
+                  <a:srgbClr val="FF0000"/>
+                </a:solidFill>
+                <a:highlight>
+                  <a:srgbClr val="00FFFF"/>
+                </a:highlight>
+              </a:rPr>
               <a:t>, program </a:t>
             </a:r>
             <a:r>
-              <a:rPr lang="fr-FR" sz="2800" dirty="0" err="1"/>
+              <a:rPr lang="fr-FR" sz="2800" dirty="0" err="1">
+                <a:solidFill>
+                  <a:srgbClr val="FF0000"/>
+                </a:solidFill>
+                <a:highlight>
+                  <a:srgbClr val="00FFFF"/>
+                </a:highlight>
+              </a:rPr>
               <a:t>spustím</a:t>
             </a:r>
             <a:r>
-              <a:rPr lang="fr-FR" sz="2800" dirty="0"/>
+              <a:rPr lang="fr-FR" sz="2800" dirty="0">
+                <a:solidFill>
+                  <a:srgbClr val="FF0000"/>
+                </a:solidFill>
+                <a:highlight>
+                  <a:srgbClr val="00FFFF"/>
+                </a:highlight>
+              </a:rPr>
               <a:t> </a:t>
             </a:r>
             <a:r>
-              <a:rPr lang="fr-FR" sz="2800" dirty="0" err="1"/>
+              <a:rPr lang="fr-FR" sz="2800" dirty="0" err="1">
+                <a:solidFill>
+                  <a:srgbClr val="FF0000"/>
+                </a:solidFill>
+                <a:highlight>
+                  <a:srgbClr val="00FFFF"/>
+                </a:highlight>
+              </a:rPr>
               <a:t>až</a:t>
             </a:r>
             <a:r>
-              <a:rPr lang="fr-FR" sz="2800" dirty="0"/>
+              <a:rPr lang="fr-FR" sz="2800" dirty="0">
+                <a:solidFill>
+                  <a:srgbClr val="FF0000"/>
+                </a:solidFill>
+                <a:highlight>
+                  <a:srgbClr val="00FFFF"/>
+                </a:highlight>
+              </a:rPr>
               <a:t> </a:t>
             </a:r>
             <a:r>
-              <a:rPr lang="fr-FR" sz="2800" dirty="0" err="1"/>
+              <a:rPr lang="fr-FR" sz="2800" dirty="0" err="1">
+                <a:solidFill>
+                  <a:srgbClr val="FF0000"/>
+                </a:solidFill>
+                <a:highlight>
+                  <a:srgbClr val="00FFFF"/>
+                </a:highlight>
+              </a:rPr>
               <a:t>keď</a:t>
             </a:r>
             <a:r>
-              <a:rPr lang="fr-FR" sz="2800" dirty="0"/>
+              <a:rPr lang="fr-FR" sz="2800" dirty="0">
+                <a:solidFill>
+                  <a:srgbClr val="FF0000"/>
+                </a:solidFill>
+                <a:highlight>
+                  <a:srgbClr val="00FFFF"/>
+                </a:highlight>
+              </a:rPr>
               <a:t> ho </a:t>
             </a:r>
             <a:r>
-              <a:rPr lang="fr-FR" sz="2800" dirty="0" err="1"/>
+              <a:rPr lang="fr-FR" sz="2800" dirty="0" err="1">
+                <a:solidFill>
+                  <a:srgbClr val="FF0000"/>
+                </a:solidFill>
+                <a:highlight>
+                  <a:srgbClr val="00FFFF"/>
+                </a:highlight>
+              </a:rPr>
               <a:t>skompilujem</a:t>
             </a:r>
-            <a:endParaRPr lang="fr-FR" sz="2800" dirty="0"/>
+            <a:endParaRPr lang="fr-FR" sz="2800" dirty="0">
+              <a:solidFill>
+                <a:srgbClr val="FF0000"/>
+              </a:solidFill>
+              <a:highlight>
+                <a:srgbClr val="00FFFF"/>
+              </a:highlight>
+            </a:endParaRPr>
           </a:p>
           <a:p>
             <a:pPr lvl="1">
@@ -7051,50 +7278,134 @@
               </a:spcBef>
             </a:pPr>
             <a:r>
-              <a:rPr lang="fr-FR" sz="2800" dirty="0" err="1"/>
+              <a:rPr lang="fr-FR" sz="2800" dirty="0" err="1">
+                <a:solidFill>
+                  <a:srgbClr val="FF0000"/>
+                </a:solidFill>
+                <a:highlight>
+                  <a:srgbClr val="00FFFF"/>
+                </a:highlight>
+              </a:rPr>
               <a:t>chyby</a:t>
             </a:r>
             <a:r>
-              <a:rPr lang="fr-FR" sz="2800" dirty="0"/>
+              <a:rPr lang="fr-FR" sz="2800" dirty="0">
+                <a:solidFill>
+                  <a:srgbClr val="FF0000"/>
+                </a:solidFill>
+                <a:highlight>
+                  <a:srgbClr val="00FFFF"/>
+                </a:highlight>
+              </a:rPr>
               <a:t> </a:t>
             </a:r>
             <a:r>
-              <a:rPr lang="fr-FR" sz="2800" dirty="0" err="1"/>
+              <a:rPr lang="fr-FR" sz="2800" dirty="0" err="1">
+                <a:solidFill>
+                  <a:srgbClr val="FF0000"/>
+                </a:solidFill>
+                <a:highlight>
+                  <a:srgbClr val="00FFFF"/>
+                </a:highlight>
+              </a:rPr>
               <a:t>nájde</a:t>
             </a:r>
             <a:r>
-              <a:rPr lang="fr-FR" sz="2800" dirty="0"/>
+              <a:rPr lang="fr-FR" sz="2800" dirty="0">
+                <a:solidFill>
+                  <a:srgbClr val="FF0000"/>
+                </a:solidFill>
+                <a:highlight>
+                  <a:srgbClr val="00FFFF"/>
+                </a:highlight>
+              </a:rPr>
               <a:t> </a:t>
             </a:r>
             <a:r>
-              <a:rPr lang="fr-FR" sz="2800" dirty="0" err="1"/>
+              <a:rPr lang="fr-FR" sz="2800" dirty="0" err="1">
+                <a:solidFill>
+                  <a:srgbClr val="FF0000"/>
+                </a:solidFill>
+                <a:highlight>
+                  <a:srgbClr val="00FFFF"/>
+                </a:highlight>
+              </a:rPr>
               <a:t>ešte</a:t>
             </a:r>
             <a:r>
-              <a:rPr lang="fr-FR" sz="2800" dirty="0"/>
+              <a:rPr lang="fr-FR" sz="2800" dirty="0">
+                <a:solidFill>
+                  <a:srgbClr val="FF0000"/>
+                </a:solidFill>
+                <a:highlight>
+                  <a:srgbClr val="00FFFF"/>
+                </a:highlight>
+              </a:rPr>
               <a:t> </a:t>
             </a:r>
             <a:r>
-              <a:rPr lang="fr-FR" sz="2800" dirty="0" err="1"/>
+              <a:rPr lang="fr-FR" sz="2800" dirty="0" err="1">
+                <a:solidFill>
+                  <a:srgbClr val="FF0000"/>
+                </a:solidFill>
+                <a:highlight>
+                  <a:srgbClr val="00FFFF"/>
+                </a:highlight>
+              </a:rPr>
               <a:t>pred</a:t>
             </a:r>
             <a:r>
-              <a:rPr lang="fr-FR" sz="2800" dirty="0"/>
+              <a:rPr lang="fr-FR" sz="2800" dirty="0">
+                <a:solidFill>
+                  <a:srgbClr val="FF0000"/>
+                </a:solidFill>
+                <a:highlight>
+                  <a:srgbClr val="00FFFF"/>
+                </a:highlight>
+              </a:rPr>
               <a:t> </a:t>
             </a:r>
             <a:r>
-              <a:rPr lang="fr-FR" sz="2800" dirty="0" err="1"/>
+              <a:rPr lang="fr-FR" sz="2800" dirty="0" err="1">
+                <a:solidFill>
+                  <a:srgbClr val="FF0000"/>
+                </a:solidFill>
+                <a:highlight>
+                  <a:srgbClr val="00FFFF"/>
+                </a:highlight>
+              </a:rPr>
               <a:t>spustením</a:t>
             </a:r>
             <a:r>
-              <a:rPr lang="fr-FR" sz="2800" dirty="0"/>
+              <a:rPr lang="fr-FR" sz="2800" dirty="0">
+                <a:solidFill>
+                  <a:srgbClr val="FF0000"/>
+                </a:solidFill>
+                <a:highlight>
+                  <a:srgbClr val="00FFFF"/>
+                </a:highlight>
+              </a:rPr>
               <a:t> </a:t>
             </a:r>
             <a:r>
-              <a:rPr lang="fr-FR" sz="2800" dirty="0" err="1"/>
+              <a:rPr lang="fr-FR" sz="2800" dirty="0" err="1">
+                <a:solidFill>
+                  <a:srgbClr val="FF0000"/>
+                </a:solidFill>
+                <a:highlight>
+                  <a:srgbClr val="00FFFF"/>
+                </a:highlight>
+              </a:rPr>
               <a:t>programu</a:t>
             </a:r>
-            <a:endParaRPr lang="fr-FR" sz="2800" dirty="0"/>
+            <a:endParaRPr lang="fr-FR" sz="2800" dirty="0">
+              <a:solidFill>
+                <a:srgbClr val="FF0000"/>
+              </a:solidFill>
+              <a:highlight>
+                <a:srgbClr val="00FFFF"/>
+              </a:highlight>
+            </a:endParaRPr>
           </a:p>
           <a:p>
             <a:pPr lvl="1">
@@ -7103,43 +7414,113 @@
               </a:spcBef>
             </a:pPr>
             <a:r>
-              <a:rPr lang="fr-FR" sz="2800" dirty="0" err="1"/>
+              <a:rPr lang="fr-FR" sz="2800" dirty="0" err="1">
+                <a:solidFill>
+                  <a:srgbClr val="FF0000"/>
+                </a:solidFill>
+                <a:highlight>
+                  <a:srgbClr val="00FFFF"/>
+                </a:highlight>
+              </a:rPr>
               <a:t>špeciálna</a:t>
             </a:r>
             <a:r>
-              <a:rPr lang="fr-FR" sz="2800" dirty="0"/>
+              <a:rPr lang="fr-FR" sz="2800" dirty="0">
+                <a:solidFill>
+                  <a:srgbClr val="FF0000"/>
+                </a:solidFill>
+                <a:highlight>
+                  <a:srgbClr val="00FFFF"/>
+                </a:highlight>
+              </a:rPr>
               <a:t> </a:t>
             </a:r>
             <a:r>
-              <a:rPr lang="fr-FR" sz="2800" dirty="0" err="1"/>
+              <a:rPr lang="fr-FR" sz="2800" dirty="0" err="1">
+                <a:solidFill>
+                  <a:srgbClr val="FF0000"/>
+                </a:solidFill>
+                <a:highlight>
+                  <a:srgbClr val="00FFFF"/>
+                </a:highlight>
+              </a:rPr>
               <a:t>verzia</a:t>
             </a:r>
             <a:r>
-              <a:rPr lang="fr-FR" sz="2800" dirty="0"/>
+              <a:rPr lang="fr-FR" sz="2800" dirty="0">
+                <a:solidFill>
+                  <a:srgbClr val="FF0000"/>
+                </a:solidFill>
+                <a:highlight>
+                  <a:srgbClr val="00FFFF"/>
+                </a:highlight>
+              </a:rPr>
               <a:t> </a:t>
             </a:r>
             <a:r>
-              <a:rPr lang="fr-FR" sz="2800" dirty="0" err="1"/>
+              <a:rPr lang="fr-FR" sz="2800" dirty="0" err="1">
+                <a:solidFill>
+                  <a:srgbClr val="FF0000"/>
+                </a:solidFill>
+                <a:highlight>
+                  <a:srgbClr val="00FFFF"/>
+                </a:highlight>
+              </a:rPr>
               <a:t>pre</a:t>
             </a:r>
             <a:r>
-              <a:rPr lang="fr-FR" sz="2800" dirty="0"/>
+              <a:rPr lang="fr-FR" sz="2800" dirty="0">
+                <a:solidFill>
+                  <a:srgbClr val="FF0000"/>
+                </a:solidFill>
+                <a:highlight>
+                  <a:srgbClr val="00FFFF"/>
+                </a:highlight>
+              </a:rPr>
               <a:t> </a:t>
             </a:r>
             <a:r>
-              <a:rPr lang="fr-FR" sz="2800" dirty="0" err="1"/>
+              <a:rPr lang="fr-FR" sz="2800" dirty="0" err="1">
+                <a:solidFill>
+                  <a:srgbClr val="FF0000"/>
+                </a:solidFill>
+                <a:highlight>
+                  <a:srgbClr val="00FFFF"/>
+                </a:highlight>
+              </a:rPr>
               <a:t>každý</a:t>
             </a:r>
             <a:r>
-              <a:rPr lang="fr-FR" sz="2800" dirty="0"/>
+              <a:rPr lang="fr-FR" sz="2800" dirty="0">
+                <a:solidFill>
+                  <a:srgbClr val="FF0000"/>
+                </a:solidFill>
+                <a:highlight>
+                  <a:srgbClr val="00FFFF"/>
+                </a:highlight>
+              </a:rPr>
               <a:t> </a:t>
             </a:r>
             <a:r>
-              <a:rPr lang="fr-FR" sz="2800" dirty="0" err="1"/>
+              <a:rPr lang="fr-FR" sz="2800" dirty="0" err="1">
+                <a:solidFill>
+                  <a:srgbClr val="FF0000"/>
+                </a:solidFill>
+                <a:highlight>
+                  <a:srgbClr val="00FFFF"/>
+                </a:highlight>
+              </a:rPr>
               <a:t>typ</a:t>
             </a:r>
             <a:r>
-              <a:rPr lang="fr-FR" sz="2800" dirty="0"/>
+              <a:rPr lang="fr-FR" sz="2800" dirty="0">
+                <a:solidFill>
+                  <a:srgbClr val="FF0000"/>
+                </a:solidFill>
+                <a:highlight>
+                  <a:srgbClr val="00FFFF"/>
+                </a:highlight>
+              </a:rPr>
               <a:t> OS a CPU</a:t>
             </a:r>
           </a:p>
@@ -7150,10 +7531,24 @@
               </a:spcBef>
             </a:pPr>
             <a:r>
-              <a:rPr lang="fr-FR" sz="2800" dirty="0"/>
+              <a:rPr lang="fr-FR" sz="2800" dirty="0">
+                <a:solidFill>
+                  <a:srgbClr val="FF0000"/>
+                </a:solidFill>
+                <a:highlight>
+                  <a:srgbClr val="00FFFF"/>
+                </a:highlight>
+              </a:rPr>
               <a:t>C, C++, Rust, Swift</a:t>
             </a:r>
-            <a:endParaRPr lang="sk-SK" sz="2800" dirty="0"/>
+            <a:endParaRPr lang="sk-SK" sz="2800" dirty="0">
+              <a:solidFill>
+                <a:srgbClr val="FF0000"/>
+              </a:solidFill>
+              <a:highlight>
+                <a:srgbClr val="00FFFF"/>
+              </a:highlight>
+            </a:endParaRPr>
           </a:p>
           <a:p>
             <a:pPr lvl="1">
@@ -7199,7 +7594,7 @@
 </p:sld>
 </file>
 
-<file path=ppt/slides/slide8.xml><?xml version="1.0" encoding="utf-8"?>
+<file path=ppt/slides/slide9.xml><?xml version="1.0" encoding="utf-8"?>
 <p:sld xmlns:a="http://schemas.openxmlformats.org/drawingml/2006/main" xmlns:r="http://schemas.openxmlformats.org/officeDocument/2006/relationships" xmlns:p="http://schemas.openxmlformats.org/presentationml/2006/main">
   <p:cSld>
     <p:bg>
@@ -7254,8 +7649,26 @@
           <a:lstStyle/>
           <a:p>
             <a:r>
-              <a:rPr lang="sk-SK" sz="4000" dirty="0"/>
-              <a:t>Interaktívne programovanie</a:t>
+              <a:rPr lang="sk-SK" sz="4000" dirty="0" err="1">
+                <a:solidFill>
+                  <a:srgbClr val="FF0000"/>
+                </a:solidFill>
+                <a:highlight>
+                  <a:srgbClr val="00FFFF"/>
+                </a:highlight>
+              </a:rPr>
+              <a:t>Python</a:t>
+            </a:r>
+            <a:r>
+              <a:rPr lang="sk-SK" sz="4000" dirty="0">
+                <a:solidFill>
+                  <a:srgbClr val="FF0000"/>
+                </a:solidFill>
+                <a:highlight>
+                  <a:srgbClr val="00FFFF"/>
+                </a:highlight>
+              </a:rPr>
+              <a:t> program</a:t>
             </a:r>
           </a:p>
         </p:txBody>
@@ -7278,8 +7691,8 @@
         </p:nvSpPr>
         <p:spPr>
           <a:xfrm>
-            <a:off x="2062843" y="1575367"/>
-            <a:ext cx="8066314" cy="1583267"/>
+            <a:off x="1425677" y="1575367"/>
+            <a:ext cx="8703480" cy="3970027"/>
           </a:xfrm>
         </p:spPr>
         <p:txBody>
@@ -7295,34 +7708,48 @@
               <a:buNone/>
             </a:pPr>
             <a:r>
-              <a:rPr lang="sk-SK" sz="2800" dirty="0"/>
-              <a:t>V konzole spustím program </a:t>
-            </a:r>
-            <a:r>
-              <a:rPr lang="sk-SK" sz="2800" dirty="0" err="1">
-                <a:highlight>
-                  <a:srgbClr val="FFFF00"/>
-                </a:highlight>
-                <a:latin typeface="Consolas" panose="020B0609020204030204" pitchFamily="49" charset="0"/>
+              <a:rPr lang="sk-SK" b="1" dirty="0">
+                <a:solidFill>
+                  <a:srgbClr val="FF0000"/>
+                </a:solidFill>
+                <a:highlight>
+                  <a:srgbClr val="00FFFF"/>
+                </a:highlight>
+              </a:rPr>
+              <a:t>Interaktívne programovanie </a:t>
+            </a:r>
+            <a:r>
+              <a:rPr lang="sk-SK" dirty="0">
+                <a:solidFill>
+                  <a:srgbClr val="FF0000"/>
+                </a:solidFill>
+                <a:highlight>
+                  <a:srgbClr val="00FFFF"/>
+                </a:highlight>
+              </a:rPr>
+              <a:t>- zadám príkaz a </a:t>
+            </a:r>
+            <a:r>
+              <a:rPr lang="sk-SK" dirty="0" err="1">
+                <a:solidFill>
+                  <a:srgbClr val="FF0000"/>
+                </a:solidFill>
+                <a:highlight>
+                  <a:srgbClr val="00FFFF"/>
+                </a:highlight>
               </a:rPr>
               <a:t>python</a:t>
             </a:r>
             <a:r>
-              <a:rPr lang="sk-SK" sz="2800" dirty="0"/>
-              <a:t> alebo </a:t>
-            </a:r>
-            <a:r>
-              <a:rPr lang="sk-SK" sz="2800" dirty="0" err="1">
-                <a:highlight>
-                  <a:srgbClr val="FFFF00"/>
-                </a:highlight>
-                <a:latin typeface="Consolas" panose="020B0609020204030204" pitchFamily="49" charset="0"/>
-              </a:rPr>
-              <a:t>py</a:t>
-            </a:r>
-            <a:r>
-              <a:rPr lang="sk-SK" sz="2800" dirty="0"/>
-              <a:t>.</a:t>
+              <a:rPr lang="sk-SK" dirty="0">
+                <a:solidFill>
+                  <a:srgbClr val="FF0000"/>
+                </a:solidFill>
+                <a:highlight>
+                  <a:srgbClr val="00FFFF"/>
+                </a:highlight>
+              </a:rPr>
+              <a:t> vypíše výsledok.</a:t>
             </a:r>
           </a:p>
           <a:p>
@@ -7333,17 +7760,46 @@
               <a:buNone/>
             </a:pPr>
             <a:r>
-              <a:rPr lang="sk-SK" sz="2800" dirty="0"/>
-              <a:t>Zadávam príkaz a </a:t>
-            </a:r>
-            <a:r>
-              <a:rPr lang="sk-SK" sz="2800" dirty="0" err="1"/>
-              <a:t>python</a:t>
-            </a:r>
-            <a:r>
-              <a:rPr lang="sk-SK" sz="2800" dirty="0"/>
-              <a:t> mi vypíše jeho výsledok.</a:t>
-            </a:r>
+              <a:rPr lang="sk-SK" b="1" dirty="0">
+                <a:solidFill>
+                  <a:srgbClr val="FF0000"/>
+                </a:solidFill>
+                <a:highlight>
+                  <a:srgbClr val="00FFFF"/>
+                </a:highlight>
+              </a:rPr>
+              <a:t>Skript</a:t>
+            </a:r>
+            <a:r>
+              <a:rPr lang="sk-SK" dirty="0">
+                <a:solidFill>
+                  <a:srgbClr val="FF0000"/>
+                </a:solidFill>
+                <a:highlight>
+                  <a:srgbClr val="00FFFF"/>
+                </a:highlight>
+              </a:rPr>
+              <a:t> - príkazy v súbore s príponou .</a:t>
+            </a:r>
+            <a:r>
+              <a:rPr lang="sk-SK" dirty="0" err="1">
+                <a:solidFill>
+                  <a:srgbClr val="FF0000"/>
+                </a:solidFill>
+                <a:highlight>
+                  <a:srgbClr val="00FFFF"/>
+                </a:highlight>
+              </a:rPr>
+              <a:t>py</a:t>
+            </a:r>
+            <a:endParaRPr lang="sk-SK" dirty="0">
+              <a:solidFill>
+                <a:srgbClr val="FF0000"/>
+              </a:solidFill>
+              <a:highlight>
+                <a:srgbClr val="00FFFF"/>
+              </a:highlight>
+            </a:endParaRPr>
           </a:p>
           <a:p>
             <a:pPr marL="0" indent="0">
@@ -7352,299 +7808,7 @@
               </a:spcBef>
               <a:buNone/>
             </a:pPr>
-            <a:r>
-              <a:rPr lang="sk-SK" sz="2800" dirty="0"/>
-              <a:t>Vhodné na skúšanie vecí a opravu chýb.</a:t>
-            </a:r>
-            <a:endParaRPr lang="sk-SK" sz="2800" i="1" dirty="0"/>
-          </a:p>
-        </p:txBody>
-      </p:sp>
-      <p:sp>
-        <p:nvSpPr>
-          <p:cNvPr id="4" name="Nadpis 1">
-            <a:extLst>
-              <a:ext uri="{FF2B5EF4-FFF2-40B4-BE49-F238E27FC236}">
-                <a16:creationId xmlns:a16="http://schemas.microsoft.com/office/drawing/2014/main" id="{A77D61C5-88FD-A797-2F00-89237AE521D2}"/>
-              </a:ext>
-            </a:extLst>
-          </p:cNvPr>
-          <p:cNvSpPr txBox="1">
-            <a:spLocks/>
-          </p:cNvSpPr>
-          <p:nvPr/>
-        </p:nvSpPr>
-        <p:spPr>
-          <a:xfrm>
-            <a:off x="838200" y="3341912"/>
-            <a:ext cx="7886700" cy="1325563"/>
-          </a:xfrm>
-          <a:prstGeom prst="rect">
-            <a:avLst/>
-          </a:prstGeom>
-        </p:spPr>
-        <p:txBody>
-          <a:bodyPr vert="horz" lIns="91440" tIns="45720" rIns="91440" bIns="45720" rtlCol="0" anchor="ctr">
-            <a:normAutofit/>
-          </a:bodyPr>
-          <a:lstStyle>
-            <a:lvl1pPr algn="l" defTabSz="685800" rtl="0" eaLnBrk="1" latinLnBrk="0" hangingPunct="1">
-              <a:lnSpc>
-                <a:spcPct val="90000"/>
-              </a:lnSpc>
-              <a:spcBef>
-                <a:spcPct val="0"/>
-              </a:spcBef>
-              <a:buNone/>
-              <a:defRPr sz="3300" kern="1200">
-                <a:solidFill>
-                  <a:schemeClr val="tx1"/>
-                </a:solidFill>
-                <a:latin typeface="+mj-lt"/>
-                <a:ea typeface="+mj-ea"/>
-                <a:cs typeface="+mj-cs"/>
-              </a:defRPr>
-            </a:lvl1pPr>
-          </a:lstStyle>
-          <a:p>
-            <a:r>
-              <a:rPr lang="sk-SK" sz="4000" dirty="0"/>
-              <a:t>Skripty</a:t>
-            </a:r>
-          </a:p>
-        </p:txBody>
-      </p:sp>
-      <p:sp>
-        <p:nvSpPr>
-          <p:cNvPr id="5" name="Zástupný objekt pre obsah 2">
-            <a:extLst>
-              <a:ext uri="{FF2B5EF4-FFF2-40B4-BE49-F238E27FC236}">
-                <a16:creationId xmlns:a16="http://schemas.microsoft.com/office/drawing/2014/main" id="{A0E42D79-7F1D-C29F-BAF1-89585E9ECC7B}"/>
-              </a:ext>
-            </a:extLst>
-          </p:cNvPr>
-          <p:cNvSpPr txBox="1">
-            <a:spLocks/>
-          </p:cNvSpPr>
-          <p:nvPr/>
-        </p:nvSpPr>
-        <p:spPr>
-          <a:xfrm>
-            <a:off x="2062843" y="4493305"/>
-            <a:ext cx="8066314" cy="1809523"/>
-          </a:xfrm>
-          <a:prstGeom prst="rect">
-            <a:avLst/>
-          </a:prstGeom>
-        </p:spPr>
-        <p:txBody>
-          <a:bodyPr vert="horz" lIns="91440" tIns="45720" rIns="91440" bIns="45720" rtlCol="0">
-            <a:noAutofit/>
-          </a:bodyPr>
-          <a:lstStyle>
-            <a:lvl1pPr marL="171450" indent="-171450" algn="l" defTabSz="685800" rtl="0" eaLnBrk="1" latinLnBrk="0" hangingPunct="1">
-              <a:lnSpc>
-                <a:spcPct val="90000"/>
-              </a:lnSpc>
-              <a:spcBef>
-                <a:spcPts val="750"/>
-              </a:spcBef>
-              <a:buFont typeface="Arial" panose="020B0604020202020204" pitchFamily="34" charset="0"/>
-              <a:buChar char="•"/>
-              <a:defRPr sz="2100" kern="1200">
-                <a:solidFill>
-                  <a:schemeClr val="tx1"/>
-                </a:solidFill>
-                <a:latin typeface="+mn-lt"/>
-                <a:ea typeface="+mn-ea"/>
-                <a:cs typeface="+mn-cs"/>
-              </a:defRPr>
-            </a:lvl1pPr>
-            <a:lvl2pPr marL="514350" indent="-171450" algn="l" defTabSz="685800" rtl="0" eaLnBrk="1" latinLnBrk="0" hangingPunct="1">
-              <a:lnSpc>
-                <a:spcPct val="90000"/>
-              </a:lnSpc>
-              <a:spcBef>
-                <a:spcPts val="375"/>
-              </a:spcBef>
-              <a:buFont typeface="Arial" panose="020B0604020202020204" pitchFamily="34" charset="0"/>
-              <a:buChar char="•"/>
-              <a:defRPr sz="1800" kern="1200">
-                <a:solidFill>
-                  <a:schemeClr val="tx1"/>
-                </a:solidFill>
-                <a:latin typeface="+mn-lt"/>
-                <a:ea typeface="+mn-ea"/>
-                <a:cs typeface="+mn-cs"/>
-              </a:defRPr>
-            </a:lvl2pPr>
-            <a:lvl3pPr marL="857250" indent="-171450" algn="l" defTabSz="685800" rtl="0" eaLnBrk="1" latinLnBrk="0" hangingPunct="1">
-              <a:lnSpc>
-                <a:spcPct val="90000"/>
-              </a:lnSpc>
-              <a:spcBef>
-                <a:spcPts val="375"/>
-              </a:spcBef>
-              <a:buFont typeface="Arial" panose="020B0604020202020204" pitchFamily="34" charset="0"/>
-              <a:buChar char="•"/>
-              <a:defRPr sz="1500" kern="1200">
-                <a:solidFill>
-                  <a:schemeClr val="tx1"/>
-                </a:solidFill>
-                <a:latin typeface="+mn-lt"/>
-                <a:ea typeface="+mn-ea"/>
-                <a:cs typeface="+mn-cs"/>
-              </a:defRPr>
-            </a:lvl3pPr>
-            <a:lvl4pPr marL="1200150" indent="-171450" algn="l" defTabSz="685800" rtl="0" eaLnBrk="1" latinLnBrk="0" hangingPunct="1">
-              <a:lnSpc>
-                <a:spcPct val="90000"/>
-              </a:lnSpc>
-              <a:spcBef>
-                <a:spcPts val="375"/>
-              </a:spcBef>
-              <a:buFont typeface="Arial" panose="020B0604020202020204" pitchFamily="34" charset="0"/>
-              <a:buChar char="•"/>
-              <a:defRPr sz="1350" kern="1200">
-                <a:solidFill>
-                  <a:schemeClr val="tx1"/>
-                </a:solidFill>
-                <a:latin typeface="+mn-lt"/>
-                <a:ea typeface="+mn-ea"/>
-                <a:cs typeface="+mn-cs"/>
-              </a:defRPr>
-            </a:lvl4pPr>
-            <a:lvl5pPr marL="1543050" indent="-171450" algn="l" defTabSz="685800" rtl="0" eaLnBrk="1" latinLnBrk="0" hangingPunct="1">
-              <a:lnSpc>
-                <a:spcPct val="90000"/>
-              </a:lnSpc>
-              <a:spcBef>
-                <a:spcPts val="375"/>
-              </a:spcBef>
-              <a:buFont typeface="Arial" panose="020B0604020202020204" pitchFamily="34" charset="0"/>
-              <a:buChar char="•"/>
-              <a:defRPr sz="1350" kern="1200">
-                <a:solidFill>
-                  <a:schemeClr val="tx1"/>
-                </a:solidFill>
-                <a:latin typeface="+mn-lt"/>
-                <a:ea typeface="+mn-ea"/>
-                <a:cs typeface="+mn-cs"/>
-              </a:defRPr>
-            </a:lvl5pPr>
-            <a:lvl6pPr marL="1885950" indent="-171450" algn="l" defTabSz="685800" rtl="0" eaLnBrk="1" latinLnBrk="0" hangingPunct="1">
-              <a:lnSpc>
-                <a:spcPct val="90000"/>
-              </a:lnSpc>
-              <a:spcBef>
-                <a:spcPts val="375"/>
-              </a:spcBef>
-              <a:buFont typeface="Arial" panose="020B0604020202020204" pitchFamily="34" charset="0"/>
-              <a:buChar char="•"/>
-              <a:defRPr sz="1350" kern="1200">
-                <a:solidFill>
-                  <a:schemeClr val="tx1"/>
-                </a:solidFill>
-                <a:latin typeface="+mn-lt"/>
-                <a:ea typeface="+mn-ea"/>
-                <a:cs typeface="+mn-cs"/>
-              </a:defRPr>
-            </a:lvl6pPr>
-            <a:lvl7pPr marL="2228850" indent="-171450" algn="l" defTabSz="685800" rtl="0" eaLnBrk="1" latinLnBrk="0" hangingPunct="1">
-              <a:lnSpc>
-                <a:spcPct val="90000"/>
-              </a:lnSpc>
-              <a:spcBef>
-                <a:spcPts val="375"/>
-              </a:spcBef>
-              <a:buFont typeface="Arial" panose="020B0604020202020204" pitchFamily="34" charset="0"/>
-              <a:buChar char="•"/>
-              <a:defRPr sz="1350" kern="1200">
-                <a:solidFill>
-                  <a:schemeClr val="tx1"/>
-                </a:solidFill>
-                <a:latin typeface="+mn-lt"/>
-                <a:ea typeface="+mn-ea"/>
-                <a:cs typeface="+mn-cs"/>
-              </a:defRPr>
-            </a:lvl7pPr>
-            <a:lvl8pPr marL="2571750" indent="-171450" algn="l" defTabSz="685800" rtl="0" eaLnBrk="1" latinLnBrk="0" hangingPunct="1">
-              <a:lnSpc>
-                <a:spcPct val="90000"/>
-              </a:lnSpc>
-              <a:spcBef>
-                <a:spcPts val="375"/>
-              </a:spcBef>
-              <a:buFont typeface="Arial" panose="020B0604020202020204" pitchFamily="34" charset="0"/>
-              <a:buChar char="•"/>
-              <a:defRPr sz="1350" kern="1200">
-                <a:solidFill>
-                  <a:schemeClr val="tx1"/>
-                </a:solidFill>
-                <a:latin typeface="+mn-lt"/>
-                <a:ea typeface="+mn-ea"/>
-                <a:cs typeface="+mn-cs"/>
-              </a:defRPr>
-            </a:lvl8pPr>
-            <a:lvl9pPr marL="2914650" indent="-171450" algn="l" defTabSz="685800" rtl="0" eaLnBrk="1" latinLnBrk="0" hangingPunct="1">
-              <a:lnSpc>
-                <a:spcPct val="90000"/>
-              </a:lnSpc>
-              <a:spcBef>
-                <a:spcPts val="375"/>
-              </a:spcBef>
-              <a:buFont typeface="Arial" panose="020B0604020202020204" pitchFamily="34" charset="0"/>
-              <a:buChar char="•"/>
-              <a:defRPr sz="1350" kern="1200">
-                <a:solidFill>
-                  <a:schemeClr val="tx1"/>
-                </a:solidFill>
-                <a:latin typeface="+mn-lt"/>
-                <a:ea typeface="+mn-ea"/>
-                <a:cs typeface="+mn-cs"/>
-              </a:defRPr>
-            </a:lvl9pPr>
-          </a:lstStyle>
-          <a:p>
-            <a:pPr marL="0" indent="0">
-              <a:spcBef>
-                <a:spcPts val="1200"/>
-              </a:spcBef>
-              <a:buNone/>
-            </a:pPr>
-            <a:r>
-              <a:rPr lang="sk-SK" sz="2800" dirty="0"/>
-              <a:t>Skript je súbor s príponou .</a:t>
-            </a:r>
-            <a:r>
-              <a:rPr lang="sk-SK" sz="2800" dirty="0" err="1"/>
-              <a:t>py</a:t>
-            </a:r>
-            <a:r>
-              <a:rPr lang="sk-SK" sz="2800" dirty="0"/>
-              <a:t>, v ktorom je kód programu.</a:t>
-            </a:r>
-          </a:p>
-          <a:p>
-            <a:pPr marL="0" indent="0">
-              <a:spcBef>
-                <a:spcPts val="1200"/>
-              </a:spcBef>
-              <a:buNone/>
-            </a:pPr>
-            <a:r>
-              <a:rPr lang="sk-SK" sz="2800" dirty="0"/>
-              <a:t>Skript vytvorím pomocou </a:t>
-            </a:r>
-            <a:r>
-              <a:rPr lang="sk-SK" sz="2800" dirty="0" err="1"/>
-              <a:t>PyCharm</a:t>
-            </a:r>
-            <a:r>
-              <a:rPr lang="sk-SK" sz="2800" dirty="0"/>
-              <a:t>. Spúšťam pomocou SHIFT-F10.</a:t>
-            </a:r>
-            <a:endParaRPr lang="sk-SK" sz="2800" i="1" dirty="0"/>
+            <a:endParaRPr lang="sk-SK" sz="2800" dirty="0"/>
           </a:p>
         </p:txBody>
       </p:sp>
@@ -7652,171 +7816,6 @@
     <p:extLst>
       <p:ext uri="{BB962C8B-B14F-4D97-AF65-F5344CB8AC3E}">
         <p14:creationId xmlns:p14="http://schemas.microsoft.com/office/powerpoint/2010/main" val="1253372789"/>
-      </p:ext>
-    </p:extLst>
-  </p:cSld>
-  <p:clrMapOvr>
-    <a:masterClrMapping/>
-  </p:clrMapOvr>
-</p:sld>
-</file>
-
-<file path=ppt/slides/slide9.xml><?xml version="1.0" encoding="utf-8"?>
-<p:sld xmlns:a="http://schemas.openxmlformats.org/drawingml/2006/main" xmlns:r="http://schemas.openxmlformats.org/officeDocument/2006/relationships" xmlns:p="http://schemas.openxmlformats.org/presentationml/2006/main">
-  <p:cSld>
-    <p:bg>
-      <p:bgPr>
-        <a:solidFill>
-          <a:schemeClr val="bg1"/>
-        </a:solidFill>
-        <a:effectLst/>
-      </p:bgPr>
-    </p:bg>
-    <p:spTree>
-      <p:nvGrpSpPr>
-        <p:cNvPr id="1" name="">
-          <a:extLst>
-            <a:ext uri="{FF2B5EF4-FFF2-40B4-BE49-F238E27FC236}">
-              <a16:creationId xmlns:a16="http://schemas.microsoft.com/office/drawing/2014/main" id="{2B19645D-3DE6-31A1-2E12-2EEEF039412D}"/>
-            </a:ext>
-          </a:extLst>
-        </p:cNvPr>
-        <p:cNvGrpSpPr/>
-        <p:nvPr/>
-      </p:nvGrpSpPr>
-      <p:grpSpPr>
-        <a:xfrm>
-          <a:off x="0" y="0"/>
-          <a:ext cx="0" cy="0"/>
-          <a:chOff x="0" y="0"/>
-          <a:chExt cx="0" cy="0"/>
-        </a:xfrm>
-      </p:grpSpPr>
-      <p:sp>
-        <p:nvSpPr>
-          <p:cNvPr id="2" name="Nadpis 1">
-            <a:extLst>
-              <a:ext uri="{FF2B5EF4-FFF2-40B4-BE49-F238E27FC236}">
-                <a16:creationId xmlns:a16="http://schemas.microsoft.com/office/drawing/2014/main" id="{9C3F4367-6FA3-4AEE-1997-FDF75A9C7E84}"/>
-              </a:ext>
-            </a:extLst>
-          </p:cNvPr>
-          <p:cNvSpPr>
-            <a:spLocks noGrp="1"/>
-          </p:cNvSpPr>
-          <p:nvPr>
-            <p:ph type="title"/>
-          </p:nvPr>
-        </p:nvSpPr>
-        <p:spPr/>
-        <p:txBody>
-          <a:bodyPr>
-            <a:normAutofit/>
-          </a:bodyPr>
-          <a:lstStyle/>
-          <a:p>
-            <a:r>
-              <a:rPr lang="sk-SK" sz="4000" dirty="0"/>
-              <a:t>Premenná</a:t>
-            </a:r>
-          </a:p>
-        </p:txBody>
-      </p:sp>
-      <p:sp>
-        <p:nvSpPr>
-          <p:cNvPr id="3" name="Zástupný objekt pre obsah 2">
-            <a:extLst>
-              <a:ext uri="{FF2B5EF4-FFF2-40B4-BE49-F238E27FC236}">
-                <a16:creationId xmlns:a16="http://schemas.microsoft.com/office/drawing/2014/main" id="{C64145DB-D746-7FAF-ADA1-8514DD2B339E}"/>
-              </a:ext>
-            </a:extLst>
-          </p:cNvPr>
-          <p:cNvSpPr>
-            <a:spLocks noGrp="1"/>
-          </p:cNvSpPr>
-          <p:nvPr>
-            <p:ph idx="1"/>
-          </p:nvPr>
-        </p:nvSpPr>
-        <p:spPr>
-          <a:xfrm>
-            <a:off x="2062843" y="1575367"/>
-            <a:ext cx="8066314" cy="1583267"/>
-          </a:xfrm>
-        </p:spPr>
-        <p:txBody>
-          <a:bodyPr>
-            <a:noAutofit/>
-          </a:bodyPr>
-          <a:lstStyle/>
-          <a:p>
-            <a:pPr marL="0" indent="0">
-              <a:spcBef>
-                <a:spcPts val="1200"/>
-              </a:spcBef>
-              <a:buNone/>
-            </a:pPr>
-            <a:r>
-              <a:rPr lang="sk-SK" sz="2800" dirty="0" err="1"/>
-              <a:t>Python</a:t>
-            </a:r>
-            <a:r>
-              <a:rPr lang="sk-SK" sz="2800" dirty="0"/>
-              <a:t> premenná je pomenovaná referencia na objekt uložený v pamäti počítača.</a:t>
-            </a:r>
-          </a:p>
-          <a:p>
-            <a:pPr marL="0" indent="0">
-              <a:spcBef>
-                <a:spcPts val="1200"/>
-              </a:spcBef>
-              <a:buNone/>
-            </a:pPr>
-            <a:r>
-              <a:rPr lang="sk-SK" sz="2800" dirty="0"/>
-              <a:t>Vytvárame a meníme pomocou operácie priradenia, napr. </a:t>
-            </a:r>
-            <a:r>
-              <a:rPr lang="sk-SK" sz="2800" dirty="0">
-                <a:highlight>
-                  <a:srgbClr val="FFFF00"/>
-                </a:highlight>
-                <a:latin typeface="Consolas" panose="020B0609020204030204" pitchFamily="49" charset="0"/>
-              </a:rPr>
-              <a:t>a = 10</a:t>
-            </a:r>
-            <a:r>
-              <a:rPr lang="sk-SK" sz="2800" dirty="0"/>
-              <a:t>.</a:t>
-            </a:r>
-          </a:p>
-          <a:p>
-            <a:pPr marL="0" indent="0">
-              <a:spcBef>
-                <a:spcPts val="1200"/>
-              </a:spcBef>
-              <a:buNone/>
-            </a:pPr>
-            <a:r>
-              <a:rPr lang="sk-SK" sz="2800" dirty="0"/>
-              <a:t>Premenná v </a:t>
-            </a:r>
-            <a:r>
-              <a:rPr lang="sk-SK" sz="2800" dirty="0" err="1"/>
-              <a:t>Pythone</a:t>
-            </a:r>
-            <a:r>
-              <a:rPr lang="sk-SK" sz="2800" dirty="0"/>
-              <a:t> nemá dátový typ, môže ukazovať na hocičo.</a:t>
-            </a:r>
-            <a:endParaRPr lang="sk-SK" sz="2800" i="1" dirty="0"/>
-          </a:p>
-        </p:txBody>
-      </p:sp>
-    </p:spTree>
-    <p:extLst>
-      <p:ext uri="{BB962C8B-B14F-4D97-AF65-F5344CB8AC3E}">
-        <p14:creationId xmlns:p14="http://schemas.microsoft.com/office/powerpoint/2010/main" val="1366001057"/>
       </p:ext>
     </p:extLst>
   </p:cSld>
